--- a/LG_부트캠프_12기_C반_프로젝트일정_및_최종제출결과물_3팀/LG_부트캠프_12기_C반_최종결과물(3팀)/포스터/LG_부트캠프_12기_C반_결과보고서(3팀).pptx
+++ b/LG_부트캠프_12기_C반_프로젝트일정_및_최종제출결과물_3팀/LG_부트캠프_12기_C반_최종결과물(3팀)/포스터/LG_부트캠프_12기_C반_결과보고서(3팀).pptx
@@ -1,22 +1,53 @@
 
 <file path=ppt/presentation.xml><?xml version="1.0" encoding="utf-8"?>
-<p:presentation xmlns:a="http://schemas.openxmlformats.org/drawingml/2006/main" xmlns:r="http://schemas.openxmlformats.org/officeDocument/2006/relationships" xmlns:p="http://schemas.openxmlformats.org/presentationml/2006/main" saveSubsetFonts="true" embedTrueTypeFonts="true">
+<p:presentation xmlns:a="http://schemas.openxmlformats.org/drawingml/2006/main" xmlns:r="http://schemas.openxmlformats.org/officeDocument/2006/relationships" xmlns:p="http://schemas.openxmlformats.org/presentationml/2006/main" embedTrueTypeFonts="1" saveSubsetFonts="1">
   <p:sldMasterIdLst>
     <p:sldMasterId id="2147483648" r:id="rId1"/>
   </p:sldMasterIdLst>
   <p:sldIdLst>
-    <p:sldId id="256" r:id="rId6"/>
+    <p:sldId id="256" r:id="rId2"/>
+    <p:sldId id="257" r:id="rId3"/>
+    <p:sldId id="259" r:id="rId4"/>
+    <p:sldId id="258" r:id="rId5"/>
   </p:sldIdLst>
   <p:sldSz cx="11315700" cy="16002000"/>
   <p:notesSz cx="6858000" cy="9144000"/>
   <p:embeddedFontLst>
     <p:embeddedFont>
-      <p:font typeface="Montserrat Bold"/>
-      <p:bold r:id="rId7"/>
+      <p:font typeface="LG스마트체2.0 SemiBold" panose="020B0600000101010101" pitchFamily="50" charset="-127"/>
+      <p:bold r:id="rId6"/>
     </p:embeddedFont>
     <p:embeddedFont>
-      <p:font typeface="Work Sans Regular"/>
+      <p:font typeface="LG스마트체2.0 Regular" panose="020B0600000101010101" pitchFamily="50" charset="-127"/>
+      <p:regular r:id="rId7"/>
+    </p:embeddedFont>
+    <p:embeddedFont>
+      <p:font typeface="LG스마트체2.0 Light" panose="020B0600000101010101" pitchFamily="50" charset="-127"/>
       <p:regular r:id="rId8"/>
+    </p:embeddedFont>
+    <p:embeddedFont>
+      <p:font typeface="Montserrat Bold" panose="020B0604020202020204" charset="0"/>
+      <p:bold r:id="rId9"/>
+    </p:embeddedFont>
+    <p:embeddedFont>
+      <p:font typeface="맑은 고딕" panose="020B0503020000020004" pitchFamily="50" charset="-127"/>
+      <p:regular r:id="rId10"/>
+      <p:bold r:id="rId11"/>
+    </p:embeddedFont>
+    <p:embeddedFont>
+      <p:font typeface="LG스마트체2.0 Bold" panose="020B0600000101010101" pitchFamily="50" charset="-127"/>
+      <p:bold r:id="rId12"/>
+    </p:embeddedFont>
+    <p:embeddedFont>
+      <p:font typeface="Work Sans Regular" panose="020B0604020202020204" charset="0"/>
+      <p:regular r:id="rId13"/>
+    </p:embeddedFont>
+    <p:embeddedFont>
+      <p:font typeface="Calibri" panose="020F0502020204030204" pitchFamily="34" charset="0"/>
+      <p:regular r:id="rId14"/>
+      <p:bold r:id="rId15"/>
+      <p:italic r:id="rId16"/>
+      <p:boldItalic r:id="rId17"/>
     </p:embeddedFont>
   </p:embeddedFontLst>
   <p:defaultTextStyle>
@@ -114,6 +145,22 @@
       </a:defRPr>
     </a:lvl9pPr>
   </p:defaultTextStyle>
+  <p:extLst>
+    <p:ext uri="{EFAFB233-063F-42B5-8137-9DF3F51BA10A}">
+      <p15:sldGuideLst xmlns:p15="http://schemas.microsoft.com/office/powerpoint/2012/main">
+        <p15:guide id="1" orient="horz" pos="2160">
+          <p15:clr>
+            <a:srgbClr val="A4A3A4"/>
+          </p15:clr>
+        </p15:guide>
+        <p15:guide id="2" pos="2880">
+          <p15:clr>
+            <a:srgbClr val="A4A3A4"/>
+          </p15:clr>
+        </p15:guide>
+      </p15:sldGuideLst>
+    </p:ext>
+  </p:extLst>
 </p:presentation>
 </file>
 
@@ -299,7 +346,7 @@
             <a:fld id="{1D8BD707-D9CF-40AE-B4C6-C98DA3205C09}" type="datetimeFigureOut">
               <a:rPr lang="en-US" smtClean="0"/>
               <a:pPr/>
-              <a:t>8/1/2011</a:t>
+              <a:t>4/21/2026</a:t>
             </a:fld>
             <a:endParaRPr lang="en-US"/>
           </a:p>
@@ -466,7 +513,7 @@
             <a:fld id="{1D8BD707-D9CF-40AE-B4C6-C98DA3205C09}" type="datetimeFigureOut">
               <a:rPr lang="en-US" smtClean="0"/>
               <a:pPr/>
-              <a:t>8/1/2011</a:t>
+              <a:t>4/21/2026</a:t>
             </a:fld>
             <a:endParaRPr lang="en-US"/>
           </a:p>
@@ -643,7 +690,7 @@
             <a:fld id="{1D8BD707-D9CF-40AE-B4C6-C98DA3205C09}" type="datetimeFigureOut">
               <a:rPr lang="en-US" smtClean="0"/>
               <a:pPr/>
-              <a:t>8/1/2011</a:t>
+              <a:t>4/21/2026</a:t>
             </a:fld>
             <a:endParaRPr lang="en-US"/>
           </a:p>
@@ -810,7 +857,7 @@
             <a:fld id="{1D8BD707-D9CF-40AE-B4C6-C98DA3205C09}" type="datetimeFigureOut">
               <a:rPr lang="en-US" smtClean="0"/>
               <a:pPr/>
-              <a:t>8/1/2011</a:t>
+              <a:t>4/21/2026</a:t>
             </a:fld>
             <a:endParaRPr lang="en-US"/>
           </a:p>
@@ -1053,7 +1100,7 @@
             <a:fld id="{1D8BD707-D9CF-40AE-B4C6-C98DA3205C09}" type="datetimeFigureOut">
               <a:rPr lang="en-US" smtClean="0"/>
               <a:pPr/>
-              <a:t>8/1/2011</a:t>
+              <a:t>4/21/2026</a:t>
             </a:fld>
             <a:endParaRPr lang="en-US"/>
           </a:p>
@@ -1338,7 +1385,7 @@
             <a:fld id="{1D8BD707-D9CF-40AE-B4C6-C98DA3205C09}" type="datetimeFigureOut">
               <a:rPr lang="en-US" smtClean="0"/>
               <a:pPr/>
-              <a:t>8/1/2011</a:t>
+              <a:t>4/21/2026</a:t>
             </a:fld>
             <a:endParaRPr lang="en-US"/>
           </a:p>
@@ -1757,7 +1804,7 @@
             <a:fld id="{1D8BD707-D9CF-40AE-B4C6-C98DA3205C09}" type="datetimeFigureOut">
               <a:rPr lang="en-US" smtClean="0"/>
               <a:pPr/>
-              <a:t>8/1/2011</a:t>
+              <a:t>4/21/2026</a:t>
             </a:fld>
             <a:endParaRPr lang="en-US"/>
           </a:p>
@@ -1872,7 +1919,7 @@
             <a:fld id="{1D8BD707-D9CF-40AE-B4C6-C98DA3205C09}" type="datetimeFigureOut">
               <a:rPr lang="en-US" smtClean="0"/>
               <a:pPr/>
-              <a:t>8/1/2011</a:t>
+              <a:t>4/21/2026</a:t>
             </a:fld>
             <a:endParaRPr lang="en-US"/>
           </a:p>
@@ -1964,7 +2011,7 @@
             <a:fld id="{1D8BD707-D9CF-40AE-B4C6-C98DA3205C09}" type="datetimeFigureOut">
               <a:rPr lang="en-US" smtClean="0"/>
               <a:pPr/>
-              <a:t>8/1/2011</a:t>
+              <a:t>4/21/2026</a:t>
             </a:fld>
             <a:endParaRPr lang="en-US"/>
           </a:p>
@@ -2238,7 +2285,7 @@
             <a:fld id="{1D8BD707-D9CF-40AE-B4C6-C98DA3205C09}" type="datetimeFigureOut">
               <a:rPr lang="en-US" smtClean="0"/>
               <a:pPr/>
-              <a:t>8/1/2011</a:t>
+              <a:t>4/21/2026</a:t>
             </a:fld>
             <a:endParaRPr lang="en-US"/>
           </a:p>
@@ -2488,7 +2535,7 @@
             <a:fld id="{1D8BD707-D9CF-40AE-B4C6-C98DA3205C09}" type="datetimeFigureOut">
               <a:rPr lang="en-US" smtClean="0"/>
               <a:pPr/>
-              <a:t>8/1/2011</a:t>
+              <a:t>4/21/2026</a:t>
             </a:fld>
             <a:endParaRPr lang="en-US"/>
           </a:p>
@@ -2698,7 +2745,7 @@
             <a:fld id="{1D8BD707-D9CF-40AE-B4C6-C98DA3205C09}" type="datetimeFigureOut">
               <a:rPr lang="en-US" smtClean="0"/>
               <a:pPr/>
-              <a:t>8/1/2011</a:t>
+              <a:t>4/21/2026</a:t>
             </a:fld>
             <a:endParaRPr lang="en-US"/>
           </a:p>
@@ -3053,16 +3100,17 @@
 </file>
 
 <file path=ppt/slides/slide1.xml><?xml version="1.0" encoding="utf-8"?>
-<p:sld xmlns:p="http://schemas.openxmlformats.org/presentationml/2006/main" xmlns:a="http://schemas.openxmlformats.org/drawingml/2006/main">
+<p:sld xmlns:a="http://schemas.openxmlformats.org/drawingml/2006/main" xmlns:r="http://schemas.openxmlformats.org/officeDocument/2006/relationships" xmlns:p="http://schemas.openxmlformats.org/presentationml/2006/main">
   <p:cSld>
-    <p:bg xmlns:r="http://schemas.openxmlformats.org/officeDocument/2006/relationships">
+    <p:bg>
       <p:bgPr>
         <a:solidFill>
           <a:srgbClr val="FFFFFF"/>
         </a:solidFill>
+        <a:effectLst/>
       </p:bgPr>
     </p:bg>
-    <p:spTree xmlns:r="http://schemas.openxmlformats.org/officeDocument/2006/relationships">
+    <p:spTree>
       <p:nvGrpSpPr>
         <p:cNvPr id="1" name=""/>
         <p:cNvGrpSpPr/>
@@ -3078,9 +3126,9 @@
       </p:grpSpPr>
       <p:pic>
         <p:nvPicPr>
-          <p:cNvPr name="Picture 2" id="2"/>
+          <p:cNvPr id="2" name="Picture 2"/>
           <p:cNvPicPr>
-            <a:picLocks noChangeAspect="true"/>
+            <a:picLocks noChangeAspect="1"/>
           </p:cNvPicPr>
           <p:nvPr/>
         </p:nvPicPr>
@@ -3091,7 +3139,7 @@
           </a:stretch>
         </p:blipFill>
         <p:spPr>
-          <a:xfrm rot="0">
+          <a:xfrm>
             <a:off x="0" y="0"/>
             <a:ext cx="11315700" cy="16002000"/>
           </a:xfrm>
@@ -3102,9 +3150,9 @@
       </p:pic>
       <p:pic>
         <p:nvPicPr>
-          <p:cNvPr name="Picture 3" id="3"/>
+          <p:cNvPr id="3" name="Picture 3"/>
           <p:cNvPicPr>
-            <a:picLocks noChangeAspect="true"/>
+            <a:picLocks noChangeAspect="1"/>
           </p:cNvPicPr>
           <p:nvPr/>
         </p:nvPicPr>
@@ -3115,7 +3163,7 @@
           </a:stretch>
         </p:blipFill>
         <p:spPr>
-          <a:xfrm rot="0">
+          <a:xfrm>
             <a:off x="0" y="15036800"/>
             <a:ext cx="11315700" cy="977900"/>
           </a:xfrm>
@@ -3126,9 +3174,9 @@
       </p:pic>
       <p:pic>
         <p:nvPicPr>
-          <p:cNvPr name="Picture 4" id="4"/>
+          <p:cNvPr id="4" name="Picture 4"/>
           <p:cNvPicPr>
-            <a:picLocks noChangeAspect="true"/>
+            <a:picLocks noChangeAspect="1"/>
           </p:cNvPicPr>
           <p:nvPr/>
         </p:nvPicPr>
@@ -3139,7 +3187,7 @@
           </a:stretch>
         </p:blipFill>
         <p:spPr>
-          <a:xfrm rot="0">
+          <a:xfrm>
             <a:off x="0" y="-25400"/>
             <a:ext cx="11315700" cy="2755900"/>
           </a:xfrm>
@@ -3150,9 +3198,9 @@
       </p:pic>
       <p:pic>
         <p:nvPicPr>
-          <p:cNvPr name="Picture 5" id="5"/>
+          <p:cNvPr id="5" name="Picture 5"/>
           <p:cNvPicPr>
-            <a:picLocks noChangeAspect="true"/>
+            <a:picLocks noChangeAspect="1"/>
           </p:cNvPicPr>
           <p:nvPr/>
         </p:nvPicPr>
@@ -3174,9 +3222,9 @@
       </p:pic>
       <p:pic>
         <p:nvPicPr>
-          <p:cNvPr name="Picture 6" id="6"/>
+          <p:cNvPr id="6" name="Picture 6"/>
           <p:cNvPicPr>
-            <a:picLocks noChangeAspect="true"/>
+            <a:picLocks noChangeAspect="1"/>
           </p:cNvPicPr>
           <p:nvPr/>
         </p:nvPicPr>
@@ -3198,9 +3246,9 @@
       </p:pic>
       <p:pic>
         <p:nvPicPr>
-          <p:cNvPr name="Picture 7" id="7"/>
+          <p:cNvPr id="11" name="Picture 11"/>
           <p:cNvPicPr>
-            <a:picLocks noChangeAspect="true"/>
+            <a:picLocks noChangeAspect="1"/>
           </p:cNvPicPr>
           <p:nvPr/>
         </p:nvPicPr>
@@ -3211,9 +3259,9 @@
           </a:stretch>
         </p:blipFill>
         <p:spPr>
-          <a:xfrm rot="0">
-            <a:off x="5270500" y="3251200"/>
-            <a:ext cx="6223000" cy="2971800"/>
+          <a:xfrm>
+            <a:off x="774700" y="3225800"/>
+            <a:ext cx="4089400" cy="736600"/>
           </a:xfrm>
           <a:prstGeom prst="rect">
             <a:avLst/>
@@ -3222,9 +3270,9 @@
       </p:pic>
       <p:pic>
         <p:nvPicPr>
-          <p:cNvPr name="Picture 8" id="8"/>
+          <p:cNvPr id="12" name="Picture 12"/>
           <p:cNvPicPr>
-            <a:picLocks noChangeAspect="true"/>
+            <a:picLocks noChangeAspect="1"/>
           </p:cNvPicPr>
           <p:nvPr/>
         </p:nvPicPr>
@@ -3235,9 +3283,9 @@
           </a:stretch>
         </p:blipFill>
         <p:spPr>
-          <a:xfrm rot="0">
-            <a:off x="5270500" y="3251200"/>
-            <a:ext cx="3098800" cy="3098800"/>
+          <a:xfrm>
+            <a:off x="5892800" y="6667500"/>
+            <a:ext cx="4673600" cy="736600"/>
           </a:xfrm>
           <a:prstGeom prst="rect">
             <a:avLst/>
@@ -3246,9 +3294,9 @@
       </p:pic>
       <p:pic>
         <p:nvPicPr>
-          <p:cNvPr name="Picture 9" id="9"/>
+          <p:cNvPr id="13" name="Picture 13"/>
           <p:cNvPicPr>
-            <a:picLocks noChangeAspect="true"/>
+            <a:picLocks noChangeAspect="1"/>
           </p:cNvPicPr>
           <p:nvPr/>
         </p:nvPicPr>
@@ -3259,9 +3307,9 @@
           </a:stretch>
         </p:blipFill>
         <p:spPr>
-          <a:xfrm rot="0">
-            <a:off x="5499100" y="9931400"/>
-            <a:ext cx="5143500" cy="4826000"/>
+          <a:xfrm>
+            <a:off x="774700" y="10414000"/>
+            <a:ext cx="4089400" cy="736600"/>
           </a:xfrm>
           <a:prstGeom prst="rect">
             <a:avLst/>
@@ -3270,9 +3318,9 @@
       </p:pic>
       <p:pic>
         <p:nvPicPr>
-          <p:cNvPr name="Picture 10" id="10"/>
+          <p:cNvPr id="14" name="Picture 14"/>
           <p:cNvPicPr>
-            <a:picLocks noChangeAspect="true"/>
+            <a:picLocks noChangeAspect="1"/>
           </p:cNvPicPr>
           <p:nvPr/>
         </p:nvPicPr>
@@ -3283,9 +3331,9 @@
           </a:stretch>
         </p:blipFill>
         <p:spPr>
-          <a:xfrm rot="0">
-            <a:off x="406400" y="6311900"/>
-            <a:ext cx="4419600" cy="3365500"/>
+          <a:xfrm>
+            <a:off x="330200" y="3098800"/>
+            <a:ext cx="1003300" cy="1003300"/>
           </a:xfrm>
           <a:prstGeom prst="rect">
             <a:avLst/>
@@ -3294,9 +3342,9 @@
       </p:pic>
       <p:pic>
         <p:nvPicPr>
-          <p:cNvPr name="Picture 11" id="11"/>
+          <p:cNvPr id="15" name="Picture 15"/>
           <p:cNvPicPr>
-            <a:picLocks noChangeAspect="true"/>
+            <a:picLocks noChangeAspect="1"/>
           </p:cNvPicPr>
           <p:nvPr/>
         </p:nvPicPr>
@@ -3307,9 +3355,9 @@
           </a:stretch>
         </p:blipFill>
         <p:spPr>
-          <a:xfrm rot="0">
-            <a:off x="774700" y="3225800"/>
-            <a:ext cx="4089400" cy="736600"/>
+          <a:xfrm>
+            <a:off x="5461000" y="6540500"/>
+            <a:ext cx="1003300" cy="1003300"/>
           </a:xfrm>
           <a:prstGeom prst="rect">
             <a:avLst/>
@@ -3318,9 +3366,9 @@
       </p:pic>
       <p:pic>
         <p:nvPicPr>
-          <p:cNvPr name="Picture 12" id="12"/>
+          <p:cNvPr id="16" name="Picture 16"/>
           <p:cNvPicPr>
-            <a:picLocks noChangeAspect="true"/>
+            <a:picLocks noChangeAspect="1"/>
           </p:cNvPicPr>
           <p:nvPr/>
         </p:nvPicPr>
@@ -3331,20 +3379,783 @@
           </a:stretch>
         </p:blipFill>
         <p:spPr>
-          <a:xfrm rot="0">
-            <a:off x="5892800" y="6667500"/>
-            <a:ext cx="4673600" cy="736600"/>
+          <a:xfrm>
+            <a:off x="330200" y="10274300"/>
+            <a:ext cx="1003300" cy="1003300"/>
           </a:xfrm>
           <a:prstGeom prst="rect">
             <a:avLst/>
           </a:prstGeom>
         </p:spPr>
       </p:pic>
+      <p:sp>
+        <p:nvSpPr>
+          <p:cNvPr id="17" name="TextBox 17"/>
+          <p:cNvSpPr txBox="1"/>
+          <p:nvPr/>
+        </p:nvSpPr>
+        <p:spPr>
+          <a:xfrm>
+            <a:off x="3022600" y="15379700"/>
+            <a:ext cx="5283200" cy="330200"/>
+          </a:xfrm>
+          <a:prstGeom prst="rect">
+            <a:avLst/>
+          </a:prstGeom>
+        </p:spPr>
+        <p:txBody>
+          <a:bodyPr lIns="0" tIns="23707" rIns="0" bIns="0" rtlCol="0" anchor="t"/>
+          <a:lstStyle/>
+          <a:p>
+            <a:pPr lvl="0" algn="ctr">
+              <a:lnSpc>
+                <a:spcPct val="99600"/>
+              </a:lnSpc>
+            </a:pPr>
+            <a:r>
+              <a:rPr lang="en-US" sz="1866" b="1" dirty="0" smtClean="0">
+                <a:solidFill>
+                  <a:srgbClr val="FAFAFA"/>
+                </a:solidFill>
+                <a:latin typeface="LG스마트체2.0 Bold" panose="020B0600000101010101" pitchFamily="50" charset="-127"/>
+                <a:ea typeface="LG스마트체2.0 Bold" panose="020B0600000101010101" pitchFamily="50" charset="-127"/>
+                <a:cs typeface="Montserrat Bold"/>
+              </a:rPr>
+              <a:t>LG ELECTRONICS</a:t>
+            </a:r>
+            <a:endParaRPr lang="en-US" sz="1866" b="1" i="0" u="none" strike="noStrike" dirty="0">
+              <a:solidFill>
+                <a:srgbClr val="FAFAFA"/>
+              </a:solidFill>
+              <a:latin typeface="LG스마트체2.0 Bold" panose="020B0600000101010101" pitchFamily="50" charset="-127"/>
+              <a:ea typeface="LG스마트체2.0 Bold" panose="020B0600000101010101" pitchFamily="50" charset="-127"/>
+              <a:cs typeface="Montserrat Bold"/>
+            </a:endParaRPr>
+          </a:p>
+        </p:txBody>
+      </p:sp>
+      <p:sp>
+        <p:nvSpPr>
+          <p:cNvPr id="18" name="TextBox 18"/>
+          <p:cNvSpPr txBox="1"/>
+          <p:nvPr/>
+        </p:nvSpPr>
+        <p:spPr>
+          <a:xfrm>
+            <a:off x="469900" y="4305300"/>
+            <a:ext cx="4495800" cy="1892300"/>
+          </a:xfrm>
+          <a:prstGeom prst="rect">
+            <a:avLst/>
+          </a:prstGeom>
+        </p:spPr>
+        <p:txBody>
+          <a:bodyPr lIns="0" tIns="30480" rIns="0" bIns="0" rtlCol="0" anchor="t"/>
+          <a:lstStyle/>
+          <a:p>
+            <a:pPr lvl="0" algn="l">
+              <a:lnSpc>
+                <a:spcPct val="99600"/>
+              </a:lnSpc>
+            </a:pPr>
+            <a:r>
+              <a:rPr lang="ko-KR" altLang="en-US" sz="2400" dirty="0" smtClean="0">
+                <a:solidFill>
+                  <a:srgbClr val="333333"/>
+                </a:solidFill>
+                <a:latin typeface="LG스마트체2.0 Light" panose="020B0600000101010101" pitchFamily="50" charset="-127"/>
+                <a:ea typeface="LG스마트체2.0 Light" panose="020B0600000101010101" pitchFamily="50" charset="-127"/>
+                <a:cs typeface="Work Sans Regular"/>
+              </a:rPr>
+              <a:t>프로젝트 명 </a:t>
+            </a:r>
+            <a:r>
+              <a:rPr lang="en-US" altLang="ko-KR" sz="2400" dirty="0" smtClean="0">
+                <a:solidFill>
+                  <a:srgbClr val="333333"/>
+                </a:solidFill>
+                <a:latin typeface="LG스마트체2.0 Light" panose="020B0600000101010101" pitchFamily="50" charset="-127"/>
+                <a:ea typeface="LG스마트체2.0 Light" panose="020B0600000101010101" pitchFamily="50" charset="-127"/>
+                <a:cs typeface="Work Sans Regular"/>
+              </a:rPr>
+              <a:t>: </a:t>
+            </a:r>
+            <a:r>
+              <a:rPr lang="ko-KR" altLang="en-US" sz="2400" smtClean="0">
+                <a:solidFill>
+                  <a:srgbClr val="333333"/>
+                </a:solidFill>
+                <a:latin typeface="LG스마트체2.0 Light" panose="020B0600000101010101" pitchFamily="50" charset="-127"/>
+                <a:ea typeface="LG스마트체2.0 Light" panose="020B0600000101010101" pitchFamily="50" charset="-127"/>
+                <a:cs typeface="Work Sans Regular"/>
+              </a:rPr>
+              <a:t>쿵야 캐치마인드 </a:t>
+            </a:r>
+            <a:endParaRPr lang="en-US" altLang="ko-KR" sz="2400" dirty="0" smtClean="0">
+              <a:solidFill>
+                <a:srgbClr val="333333"/>
+              </a:solidFill>
+              <a:latin typeface="LG스마트체2.0 Light" panose="020B0600000101010101" pitchFamily="50" charset="-127"/>
+              <a:ea typeface="LG스마트체2.0 Light" panose="020B0600000101010101" pitchFamily="50" charset="-127"/>
+              <a:cs typeface="Work Sans Regular"/>
+            </a:endParaRPr>
+          </a:p>
+          <a:p>
+            <a:pPr lvl="0" algn="l">
+              <a:lnSpc>
+                <a:spcPct val="99600"/>
+              </a:lnSpc>
+            </a:pPr>
+            <a:endParaRPr lang="en-US" sz="2400" b="0" i="0" u="none" strike="noStrike" dirty="0">
+              <a:solidFill>
+                <a:srgbClr val="333333"/>
+              </a:solidFill>
+              <a:latin typeface="LG스마트체2.0 Light" panose="020B0600000101010101" pitchFamily="50" charset="-127"/>
+              <a:ea typeface="LG스마트체2.0 Light" panose="020B0600000101010101" pitchFamily="50" charset="-127"/>
+              <a:cs typeface="Work Sans Regular"/>
+            </a:endParaRPr>
+          </a:p>
+        </p:txBody>
+      </p:sp>
+      <p:sp>
+        <p:nvSpPr>
+          <p:cNvPr id="19" name="TextBox 19"/>
+          <p:cNvSpPr txBox="1"/>
+          <p:nvPr/>
+        </p:nvSpPr>
+        <p:spPr>
+          <a:xfrm>
+            <a:off x="5600700" y="7721600"/>
+            <a:ext cx="5092700" cy="1892300"/>
+          </a:xfrm>
+          <a:prstGeom prst="rect">
+            <a:avLst/>
+          </a:prstGeom>
+        </p:spPr>
+        <p:txBody>
+          <a:bodyPr lIns="0" tIns="30480" rIns="0" bIns="0" rtlCol="0" anchor="t"/>
+          <a:lstStyle/>
+          <a:p>
+            <a:pPr lvl="0" algn="l">
+              <a:lnSpc>
+                <a:spcPct val="99600"/>
+              </a:lnSpc>
+            </a:pPr>
+            <a:r>
+              <a:rPr lang="en-US" sz="2400" b="0" i="0" u="none" strike="noStrike" dirty="0" err="1" smtClean="0">
+                <a:solidFill>
+                  <a:srgbClr val="333333"/>
+                </a:solidFill>
+                <a:latin typeface="Work Sans Regular"/>
+                <a:ea typeface="Work Sans Regular"/>
+                <a:cs typeface="Work Sans Regular"/>
+              </a:rPr>
+              <a:t>aaa</a:t>
+            </a:r>
+            <a:endParaRPr lang="en-US" sz="2400" b="0" i="0" u="none" strike="noStrike" dirty="0">
+              <a:solidFill>
+                <a:srgbClr val="333333"/>
+              </a:solidFill>
+              <a:latin typeface="Work Sans Regular"/>
+              <a:ea typeface="Work Sans Regular"/>
+              <a:cs typeface="Work Sans Regular"/>
+            </a:endParaRPr>
+          </a:p>
+        </p:txBody>
+      </p:sp>
+      <p:sp>
+        <p:nvSpPr>
+          <p:cNvPr id="20" name="TextBox 20"/>
+          <p:cNvSpPr txBox="1"/>
+          <p:nvPr/>
+        </p:nvSpPr>
+        <p:spPr>
+          <a:xfrm>
+            <a:off x="444500" y="11468100"/>
+            <a:ext cx="4546600" cy="3149600"/>
+          </a:xfrm>
+          <a:prstGeom prst="rect">
+            <a:avLst/>
+          </a:prstGeom>
+        </p:spPr>
+        <p:txBody>
+          <a:bodyPr lIns="0" tIns="32173" rIns="0" bIns="0" rtlCol="0" anchor="t"/>
+          <a:lstStyle/>
+          <a:p>
+            <a:pPr lvl="0" algn="l">
+              <a:lnSpc>
+                <a:spcPct val="99600"/>
+              </a:lnSpc>
+            </a:pPr>
+            <a:r>
+              <a:rPr lang="en-US" sz="2533" b="0" i="0" u="none" strike="noStrike" dirty="0" err="1" smtClean="0">
+                <a:solidFill>
+                  <a:srgbClr val="333333"/>
+                </a:solidFill>
+                <a:latin typeface="Work Sans Regular"/>
+                <a:ea typeface="Work Sans Regular"/>
+                <a:cs typeface="Work Sans Regular"/>
+              </a:rPr>
+              <a:t>aaaaaa</a:t>
+            </a:r>
+            <a:endParaRPr lang="en-US" sz="2533" b="0" i="0" u="none" strike="noStrike" dirty="0">
+              <a:solidFill>
+                <a:srgbClr val="333333"/>
+              </a:solidFill>
+              <a:latin typeface="Work Sans Regular"/>
+              <a:ea typeface="Work Sans Regular"/>
+              <a:cs typeface="Work Sans Regular"/>
+            </a:endParaRPr>
+          </a:p>
+        </p:txBody>
+      </p:sp>
+      <p:sp>
+        <p:nvSpPr>
+          <p:cNvPr id="21" name="TextBox 21"/>
+          <p:cNvSpPr txBox="1"/>
+          <p:nvPr/>
+        </p:nvSpPr>
+        <p:spPr>
+          <a:xfrm>
+            <a:off x="1270000" y="10502900"/>
+            <a:ext cx="3644900" cy="571500"/>
+          </a:xfrm>
+          <a:prstGeom prst="rect">
+            <a:avLst/>
+          </a:prstGeom>
+        </p:spPr>
+        <p:txBody>
+          <a:bodyPr lIns="0" tIns="40640" rIns="0" bIns="0" rtlCol="0" anchor="t"/>
+          <a:lstStyle/>
+          <a:p>
+            <a:pPr lvl="0" algn="ctr">
+              <a:lnSpc>
+                <a:spcPct val="99600"/>
+              </a:lnSpc>
+            </a:pPr>
+            <a:r>
+              <a:rPr lang="ko-KR" altLang="en-US" sz="3200" b="0" i="0" u="none" strike="noStrike" dirty="0" smtClean="0">
+                <a:solidFill>
+                  <a:srgbClr val="FAFAFA"/>
+                </a:solidFill>
+                <a:latin typeface="LG스마트체2.0 SemiBold" panose="020B0600000101010101" pitchFamily="50" charset="-127"/>
+                <a:ea typeface="LG스마트체2.0 SemiBold" panose="020B0600000101010101" pitchFamily="50" charset="-127"/>
+                <a:cs typeface="Montserrat Bold"/>
+              </a:rPr>
+              <a:t>개발 결과</a:t>
+            </a:r>
+            <a:endParaRPr lang="en-US" sz="3200" b="0" i="0" u="none" strike="noStrike" dirty="0">
+              <a:solidFill>
+                <a:srgbClr val="FAFAFA"/>
+              </a:solidFill>
+              <a:latin typeface="LG스마트체2.0 SemiBold" panose="020B0600000101010101" pitchFamily="50" charset="-127"/>
+              <a:ea typeface="LG스마트체2.0 SemiBold" panose="020B0600000101010101" pitchFamily="50" charset="-127"/>
+              <a:cs typeface="Montserrat Bold"/>
+            </a:endParaRPr>
+          </a:p>
+        </p:txBody>
+      </p:sp>
+      <p:sp>
+        <p:nvSpPr>
+          <p:cNvPr id="22" name="TextBox 22"/>
+          <p:cNvSpPr txBox="1"/>
+          <p:nvPr/>
+        </p:nvSpPr>
+        <p:spPr>
+          <a:xfrm>
+            <a:off x="6400800" y="6781800"/>
+            <a:ext cx="4025900" cy="571500"/>
+          </a:xfrm>
+          <a:prstGeom prst="rect">
+            <a:avLst/>
+          </a:prstGeom>
+        </p:spPr>
+        <p:txBody>
+          <a:bodyPr lIns="0" tIns="40640" rIns="0" bIns="0" rtlCol="0" anchor="t"/>
+          <a:lstStyle/>
+          <a:p>
+            <a:pPr lvl="0" algn="ctr">
+              <a:lnSpc>
+                <a:spcPct val="99600"/>
+              </a:lnSpc>
+            </a:pPr>
+            <a:r>
+              <a:rPr lang="ko-KR" altLang="en-US" sz="3200" b="0" i="0" u="none" strike="noStrike" dirty="0" smtClean="0">
+                <a:solidFill>
+                  <a:srgbClr val="FAFAFA"/>
+                </a:solidFill>
+                <a:latin typeface="LG스마트체2.0 SemiBold" panose="020B0600000101010101" pitchFamily="50" charset="-127"/>
+                <a:ea typeface="LG스마트체2.0 SemiBold" panose="020B0600000101010101" pitchFamily="50" charset="-127"/>
+                <a:cs typeface="Montserrat Bold"/>
+              </a:rPr>
+              <a:t>핵심 기술</a:t>
+            </a:r>
+            <a:endParaRPr lang="en-US" sz="3200" b="0" i="0" u="none" strike="noStrike" dirty="0">
+              <a:solidFill>
+                <a:srgbClr val="FAFAFA"/>
+              </a:solidFill>
+              <a:latin typeface="LG스마트체2.0 SemiBold" panose="020B0600000101010101" pitchFamily="50" charset="-127"/>
+              <a:ea typeface="LG스마트체2.0 SemiBold" panose="020B0600000101010101" pitchFamily="50" charset="-127"/>
+              <a:cs typeface="Montserrat Bold"/>
+            </a:endParaRPr>
+          </a:p>
+        </p:txBody>
+      </p:sp>
+      <p:sp>
+        <p:nvSpPr>
+          <p:cNvPr id="23" name="TextBox 23"/>
+          <p:cNvSpPr txBox="1"/>
+          <p:nvPr/>
+        </p:nvSpPr>
+        <p:spPr>
+          <a:xfrm>
+            <a:off x="1270000" y="3327400"/>
+            <a:ext cx="3644900" cy="571500"/>
+          </a:xfrm>
+          <a:prstGeom prst="rect">
+            <a:avLst/>
+          </a:prstGeom>
+        </p:spPr>
+        <p:txBody>
+          <a:bodyPr lIns="0" tIns="40640" rIns="0" bIns="0" rtlCol="0" anchor="t"/>
+          <a:lstStyle/>
+          <a:p>
+            <a:pPr lvl="0" algn="ctr">
+              <a:lnSpc>
+                <a:spcPct val="99600"/>
+              </a:lnSpc>
+            </a:pPr>
+            <a:r>
+              <a:rPr lang="ko-KR" altLang="en-US" sz="3200" b="0" i="0" u="none" strike="noStrike" dirty="0" smtClean="0">
+                <a:solidFill>
+                  <a:srgbClr val="FAFAFA"/>
+                </a:solidFill>
+                <a:latin typeface="LG스마트체2.0 SemiBold" panose="020B0600000101010101" pitchFamily="50" charset="-127"/>
+                <a:ea typeface="LG스마트체2.0 SemiBold" panose="020B0600000101010101" pitchFamily="50" charset="-127"/>
+                <a:cs typeface="Montserrat Bold"/>
+              </a:rPr>
+              <a:t>프로젝트 개요</a:t>
+            </a:r>
+            <a:endParaRPr lang="en-US" sz="3200" b="0" i="0" u="none" strike="noStrike" dirty="0">
+              <a:solidFill>
+                <a:srgbClr val="FAFAFA"/>
+              </a:solidFill>
+              <a:latin typeface="LG스마트체2.0 SemiBold" panose="020B0600000101010101" pitchFamily="50" charset="-127"/>
+              <a:ea typeface="LG스마트체2.0 SemiBold" panose="020B0600000101010101" pitchFamily="50" charset="-127"/>
+              <a:cs typeface="Montserrat Bold"/>
+            </a:endParaRPr>
+          </a:p>
+        </p:txBody>
+      </p:sp>
+      <p:sp>
+        <p:nvSpPr>
+          <p:cNvPr id="24" name="TextBox 24"/>
+          <p:cNvSpPr txBox="1"/>
+          <p:nvPr/>
+        </p:nvSpPr>
+        <p:spPr>
+          <a:xfrm>
+            <a:off x="5626100" y="6769100"/>
+            <a:ext cx="673100" cy="571500"/>
+          </a:xfrm>
+          <a:prstGeom prst="rect">
+            <a:avLst/>
+          </a:prstGeom>
+        </p:spPr>
+        <p:txBody>
+          <a:bodyPr lIns="0" tIns="40640" rIns="0" bIns="0" rtlCol="0" anchor="t"/>
+          <a:lstStyle/>
+          <a:p>
+            <a:pPr lvl="0" algn="ctr">
+              <a:lnSpc>
+                <a:spcPct val="99600"/>
+              </a:lnSpc>
+            </a:pPr>
+            <a:r>
+              <a:rPr lang="en-US" sz="3200" b="0" i="0" u="none" strike="noStrike" dirty="0">
+                <a:solidFill>
+                  <a:srgbClr val="FAFAFA"/>
+                </a:solidFill>
+                <a:latin typeface="LG스마트체2.0 Bold" panose="020B0600000101010101" pitchFamily="50" charset="-127"/>
+                <a:ea typeface="LG스마트체2.0 Bold" panose="020B0600000101010101" pitchFamily="50" charset="-127"/>
+                <a:cs typeface="Montserrat Bold"/>
+              </a:rPr>
+              <a:t>02</a:t>
+            </a:r>
+          </a:p>
+        </p:txBody>
+      </p:sp>
+      <p:sp>
+        <p:nvSpPr>
+          <p:cNvPr id="25" name="TextBox 25"/>
+          <p:cNvSpPr txBox="1"/>
+          <p:nvPr/>
+        </p:nvSpPr>
+        <p:spPr>
+          <a:xfrm>
+            <a:off x="495300" y="10502900"/>
+            <a:ext cx="673100" cy="571500"/>
+          </a:xfrm>
+          <a:prstGeom prst="rect">
+            <a:avLst/>
+          </a:prstGeom>
+        </p:spPr>
+        <p:txBody>
+          <a:bodyPr lIns="0" tIns="40640" rIns="0" bIns="0" rtlCol="0" anchor="t"/>
+          <a:lstStyle/>
+          <a:p>
+            <a:pPr lvl="0" algn="ctr">
+              <a:lnSpc>
+                <a:spcPct val="99600"/>
+              </a:lnSpc>
+            </a:pPr>
+            <a:r>
+              <a:rPr lang="en-US" sz="3200" b="0" i="0" u="none" strike="noStrike" dirty="0">
+                <a:solidFill>
+                  <a:srgbClr val="FAFAFA"/>
+                </a:solidFill>
+                <a:latin typeface="LG스마트체2.0 Bold" panose="020B0600000101010101" pitchFamily="50" charset="-127"/>
+                <a:ea typeface="LG스마트체2.0 Bold" panose="020B0600000101010101" pitchFamily="50" charset="-127"/>
+                <a:cs typeface="Montserrat Bold"/>
+              </a:rPr>
+              <a:t>03</a:t>
+            </a:r>
+          </a:p>
+        </p:txBody>
+      </p:sp>
+      <p:sp>
+        <p:nvSpPr>
+          <p:cNvPr id="26" name="TextBox 26"/>
+          <p:cNvSpPr txBox="1"/>
+          <p:nvPr/>
+        </p:nvSpPr>
+        <p:spPr>
+          <a:xfrm>
+            <a:off x="546100" y="3327400"/>
+            <a:ext cx="584200" cy="571500"/>
+          </a:xfrm>
+          <a:prstGeom prst="rect">
+            <a:avLst/>
+          </a:prstGeom>
+        </p:spPr>
+        <p:txBody>
+          <a:bodyPr lIns="0" tIns="40640" rIns="0" bIns="0" rtlCol="0" anchor="t"/>
+          <a:lstStyle/>
+          <a:p>
+            <a:pPr lvl="0" algn="ctr">
+              <a:lnSpc>
+                <a:spcPct val="99600"/>
+              </a:lnSpc>
+            </a:pPr>
+            <a:r>
+              <a:rPr lang="en-US" sz="3200" b="0" i="0" u="none" strike="noStrike" dirty="0">
+                <a:solidFill>
+                  <a:srgbClr val="FAFAFA"/>
+                </a:solidFill>
+                <a:latin typeface="LG스마트체2.0 Bold" panose="020B0600000101010101" pitchFamily="50" charset="-127"/>
+                <a:ea typeface="LG스마트체2.0 Bold" panose="020B0600000101010101" pitchFamily="50" charset="-127"/>
+                <a:cs typeface="Montserrat Bold"/>
+              </a:rPr>
+              <a:t>01</a:t>
+            </a:r>
+          </a:p>
+        </p:txBody>
+      </p:sp>
+      <p:sp>
+        <p:nvSpPr>
+          <p:cNvPr id="27" name="TextBox 27"/>
+          <p:cNvSpPr txBox="1"/>
+          <p:nvPr/>
+        </p:nvSpPr>
+        <p:spPr>
+          <a:xfrm>
+            <a:off x="736600" y="533400"/>
+            <a:ext cx="9829800" cy="1384300"/>
+          </a:xfrm>
+          <a:prstGeom prst="rect">
+            <a:avLst/>
+          </a:prstGeom>
+        </p:spPr>
+        <p:txBody>
+          <a:bodyPr lIns="0" tIns="115146" rIns="0" bIns="0" rtlCol="0" anchor="t"/>
+          <a:lstStyle/>
+          <a:p>
+            <a:pPr lvl="0" algn="ctr">
+              <a:lnSpc>
+                <a:spcPct val="83000"/>
+              </a:lnSpc>
+            </a:pPr>
+            <a:r>
+              <a:rPr lang="ko-KR" altLang="en-US" sz="4533" dirty="0">
+                <a:solidFill>
+                  <a:srgbClr val="FAFAFA"/>
+                </a:solidFill>
+                <a:latin typeface="LG스마트체2.0 SemiBold" panose="020B0600000101010101" pitchFamily="50" charset="-127"/>
+                <a:ea typeface="LG스마트체2.0 SemiBold" panose="020B0600000101010101" pitchFamily="50" charset="-127"/>
+                <a:cs typeface="Montserrat Bold"/>
+              </a:rPr>
+              <a:t>다중 클라이언트 실시간 </a:t>
+            </a:r>
+            <a:r>
+              <a:rPr lang="en-US" altLang="ko-KR" sz="4533" dirty="0">
+                <a:solidFill>
+                  <a:srgbClr val="FAFAFA"/>
+                </a:solidFill>
+                <a:latin typeface="LG스마트체2.0 SemiBold" panose="020B0600000101010101" pitchFamily="50" charset="-127"/>
+                <a:ea typeface="LG스마트체2.0 SemiBold" panose="020B0600000101010101" pitchFamily="50" charset="-127"/>
+                <a:cs typeface="Montserrat Bold"/>
+              </a:rPr>
+              <a:t>UDP </a:t>
+            </a:r>
+            <a:r>
+              <a:rPr lang="ko-KR" altLang="en-US" sz="4533" smtClean="0">
+                <a:solidFill>
+                  <a:srgbClr val="FAFAFA"/>
+                </a:solidFill>
+                <a:latin typeface="LG스마트체2.0 SemiBold" panose="020B0600000101010101" pitchFamily="50" charset="-127"/>
+                <a:ea typeface="LG스마트체2.0 SemiBold" panose="020B0600000101010101" pitchFamily="50" charset="-127"/>
+                <a:cs typeface="Montserrat Bold"/>
+              </a:rPr>
+              <a:t>통신을</a:t>
+            </a:r>
+            <a:r>
+              <a:rPr lang="en-US" altLang="ko-KR" sz="4533" dirty="0" smtClean="0">
+                <a:solidFill>
+                  <a:srgbClr val="FAFAFA"/>
+                </a:solidFill>
+                <a:latin typeface="LG스마트체2.0 SemiBold" panose="020B0600000101010101" pitchFamily="50" charset="-127"/>
+                <a:ea typeface="LG스마트체2.0 SemiBold" panose="020B0600000101010101" pitchFamily="50" charset="-127"/>
+                <a:cs typeface="Montserrat Bold"/>
+              </a:rPr>
+              <a:t> </a:t>
+            </a:r>
+            <a:r>
+              <a:rPr lang="ko-KR" altLang="en-US" sz="4533" smtClean="0">
+                <a:solidFill>
+                  <a:srgbClr val="FAFAFA"/>
+                </a:solidFill>
+                <a:latin typeface="LG스마트체2.0 SemiBold" panose="020B0600000101010101" pitchFamily="50" charset="-127"/>
+                <a:ea typeface="LG스마트체2.0 SemiBold" panose="020B0600000101010101" pitchFamily="50" charset="-127"/>
+                <a:cs typeface="Montserrat Bold"/>
+              </a:rPr>
+              <a:t>활용한 </a:t>
+            </a:r>
+            <a:r>
+              <a:rPr lang="ko-KR" altLang="en-US" sz="4533" b="0" i="0" u="none" strike="noStrike" smtClean="0">
+                <a:solidFill>
+                  <a:srgbClr val="FAFAFA"/>
+                </a:solidFill>
+                <a:latin typeface="LG스마트체2.0 SemiBold" panose="020B0600000101010101" pitchFamily="50" charset="-127"/>
+                <a:ea typeface="LG스마트체2.0 SemiBold" panose="020B0600000101010101" pitchFamily="50" charset="-127"/>
+                <a:cs typeface="Montserrat Bold"/>
+              </a:rPr>
+              <a:t>쿵야 캐치 마인드 게임 구현</a:t>
+            </a:r>
+            <a:endParaRPr lang="en-US" sz="4533" b="0" i="0" u="none" strike="noStrike" dirty="0">
+              <a:solidFill>
+                <a:srgbClr val="FAFAFA"/>
+              </a:solidFill>
+              <a:latin typeface="LG스마트체2.0 SemiBold" panose="020B0600000101010101" pitchFamily="50" charset="-127"/>
+              <a:ea typeface="LG스마트체2.0 SemiBold" panose="020B0600000101010101" pitchFamily="50" charset="-127"/>
+              <a:cs typeface="Montserrat Bold"/>
+            </a:endParaRPr>
+          </a:p>
+        </p:txBody>
+      </p:sp>
+      <p:sp>
+        <p:nvSpPr>
+          <p:cNvPr id="28" name="TextBox 28"/>
+          <p:cNvSpPr txBox="1"/>
+          <p:nvPr/>
+        </p:nvSpPr>
+        <p:spPr>
+          <a:xfrm>
+            <a:off x="1181100" y="1993900"/>
+            <a:ext cx="8966200" cy="431800"/>
+          </a:xfrm>
+          <a:prstGeom prst="rect">
+            <a:avLst/>
+          </a:prstGeom>
+        </p:spPr>
+        <p:txBody>
+          <a:bodyPr lIns="0" tIns="30480" rIns="0" bIns="0" rtlCol="0" anchor="t"/>
+          <a:lstStyle/>
+          <a:p>
+            <a:pPr lvl="0" algn="r">
+              <a:lnSpc>
+                <a:spcPct val="99600"/>
+              </a:lnSpc>
+            </a:pPr>
+            <a:r>
+              <a:rPr lang="ko-KR" altLang="en-US" sz="2400" b="0" i="0" u="none" strike="noStrike" dirty="0" smtClean="0">
+                <a:solidFill>
+                  <a:srgbClr val="FAFAFA"/>
+                </a:solidFill>
+                <a:latin typeface="LG스마트체2.0 Regular" panose="020B0600000101010101" pitchFamily="50" charset="-127"/>
+                <a:ea typeface="LG스마트체2.0 Regular" panose="020B0600000101010101" pitchFamily="50" charset="-127"/>
+                <a:cs typeface="Work Sans Regular"/>
+              </a:rPr>
+              <a:t>소속</a:t>
+            </a:r>
+            <a:r>
+              <a:rPr lang="en-US" altLang="ko-KR" sz="2400" dirty="0">
+                <a:solidFill>
+                  <a:srgbClr val="FAFAFA"/>
+                </a:solidFill>
+                <a:latin typeface="LG스마트체2.0 Regular" panose="020B0600000101010101" pitchFamily="50" charset="-127"/>
+                <a:ea typeface="LG스마트체2.0 Regular" panose="020B0600000101010101" pitchFamily="50" charset="-127"/>
+                <a:cs typeface="Work Sans Regular"/>
+              </a:rPr>
+              <a:t>/</a:t>
+            </a:r>
+            <a:r>
+              <a:rPr lang="ko-KR" altLang="en-US" sz="2400" b="0" i="0" u="none" strike="noStrike" smtClean="0">
+                <a:solidFill>
+                  <a:srgbClr val="FAFAFA"/>
+                </a:solidFill>
+                <a:latin typeface="LG스마트체2.0 Regular" panose="020B0600000101010101" pitchFamily="50" charset="-127"/>
+                <a:ea typeface="LG스마트체2.0 Regular" panose="020B0600000101010101" pitchFamily="50" charset="-127"/>
+                <a:cs typeface="Work Sans Regular"/>
+              </a:rPr>
+              <a:t>성명 </a:t>
+            </a:r>
+            <a:r>
+              <a:rPr lang="en-US" altLang="ko-KR" sz="2400" b="0" i="0" u="none" strike="noStrike" dirty="0" smtClean="0">
+                <a:solidFill>
+                  <a:srgbClr val="FAFAFA"/>
+                </a:solidFill>
+                <a:latin typeface="LG스마트체2.0 Regular" panose="020B0600000101010101" pitchFamily="50" charset="-127"/>
+                <a:ea typeface="LG스마트체2.0 Regular" panose="020B0600000101010101" pitchFamily="50" charset="-127"/>
+                <a:cs typeface="Work Sans Regular"/>
+              </a:rPr>
+              <a:t>: </a:t>
+            </a:r>
+            <a:r>
+              <a:rPr lang="ko-KR" altLang="en-US" sz="2400" b="0" i="0" u="none" strike="noStrike" smtClean="0">
+                <a:solidFill>
+                  <a:srgbClr val="FAFAFA"/>
+                </a:solidFill>
+                <a:latin typeface="LG스마트체2.0 Regular" panose="020B0600000101010101" pitchFamily="50" charset="-127"/>
+                <a:ea typeface="LG스마트체2.0 Regular" panose="020B0600000101010101" pitchFamily="50" charset="-127"/>
+                <a:cs typeface="Work Sans Regular"/>
+              </a:rPr>
+              <a:t>엄제원</a:t>
+            </a:r>
+            <a:r>
+              <a:rPr lang="en-US" altLang="ko-KR" sz="2400" b="0" i="0" u="none" strike="noStrike" dirty="0" smtClean="0">
+                <a:solidFill>
+                  <a:srgbClr val="FAFAFA"/>
+                </a:solidFill>
+                <a:latin typeface="LG스마트체2.0 Regular" panose="020B0600000101010101" pitchFamily="50" charset="-127"/>
+                <a:ea typeface="LG스마트체2.0 Regular" panose="020B0600000101010101" pitchFamily="50" charset="-127"/>
+                <a:cs typeface="Work Sans Regular"/>
+              </a:rPr>
+              <a:t>, </a:t>
+            </a:r>
+            <a:r>
+              <a:rPr lang="ko-KR" altLang="en-US" sz="2400" b="0" i="0" u="none" strike="noStrike" smtClean="0">
+                <a:solidFill>
+                  <a:srgbClr val="FAFAFA"/>
+                </a:solidFill>
+                <a:latin typeface="LG스마트체2.0 Regular" panose="020B0600000101010101" pitchFamily="50" charset="-127"/>
+                <a:ea typeface="LG스마트체2.0 Regular" panose="020B0600000101010101" pitchFamily="50" charset="-127"/>
+                <a:cs typeface="Work Sans Regular"/>
+              </a:rPr>
+              <a:t>이경환</a:t>
+            </a:r>
+            <a:r>
+              <a:rPr lang="en-US" altLang="ko-KR" sz="2400" b="0" i="0" u="none" strike="noStrike" dirty="0" smtClean="0">
+                <a:solidFill>
+                  <a:srgbClr val="FAFAFA"/>
+                </a:solidFill>
+                <a:latin typeface="LG스마트체2.0 Regular" panose="020B0600000101010101" pitchFamily="50" charset="-127"/>
+                <a:ea typeface="LG스마트체2.0 Regular" panose="020B0600000101010101" pitchFamily="50" charset="-127"/>
+                <a:cs typeface="Work Sans Regular"/>
+              </a:rPr>
+              <a:t>, </a:t>
+            </a:r>
+            <a:r>
+              <a:rPr lang="ko-KR" altLang="en-US" sz="2400" b="0" i="0" u="none" strike="noStrike" smtClean="0">
+                <a:solidFill>
+                  <a:srgbClr val="FAFAFA"/>
+                </a:solidFill>
+                <a:latin typeface="LG스마트체2.0 Regular" panose="020B0600000101010101" pitchFamily="50" charset="-127"/>
+                <a:ea typeface="LG스마트체2.0 Regular" panose="020B0600000101010101" pitchFamily="50" charset="-127"/>
+                <a:cs typeface="Work Sans Regular"/>
+              </a:rPr>
+              <a:t>윤지원</a:t>
+            </a:r>
+            <a:r>
+              <a:rPr lang="en-US" altLang="ko-KR" sz="2400" b="0" i="0" u="none" strike="noStrike" dirty="0" smtClean="0">
+                <a:solidFill>
+                  <a:srgbClr val="FAFAFA"/>
+                </a:solidFill>
+                <a:latin typeface="LG스마트체2.0 Regular" panose="020B0600000101010101" pitchFamily="50" charset="-127"/>
+                <a:ea typeface="LG스마트체2.0 Regular" panose="020B0600000101010101" pitchFamily="50" charset="-127"/>
+                <a:cs typeface="Work Sans Regular"/>
+              </a:rPr>
+              <a:t> </a:t>
+            </a:r>
+            <a:endParaRPr lang="en-US" sz="2400" b="0" i="0" u="none" strike="noStrike" dirty="0">
+              <a:solidFill>
+                <a:srgbClr val="FAFAFA"/>
+              </a:solidFill>
+              <a:latin typeface="LG스마트체2.0 Regular" panose="020B0600000101010101" pitchFamily="50" charset="-127"/>
+              <a:ea typeface="LG스마트체2.0 Regular" panose="020B0600000101010101" pitchFamily="50" charset="-127"/>
+              <a:cs typeface="Work Sans Regular"/>
+            </a:endParaRPr>
+          </a:p>
+        </p:txBody>
+      </p:sp>
+      <p:sp>
+        <p:nvSpPr>
+          <p:cNvPr id="29" name="직사각형 28"/>
+          <p:cNvSpPr/>
+          <p:nvPr/>
+        </p:nvSpPr>
+        <p:spPr>
+          <a:xfrm>
+            <a:off x="5461000" y="10414000"/>
+            <a:ext cx="4965700" cy="4203700"/>
+          </a:xfrm>
+          <a:prstGeom prst="rect">
+            <a:avLst/>
+          </a:prstGeom>
+        </p:spPr>
+        <p:style>
+          <a:lnRef idx="2">
+            <a:schemeClr val="accent1">
+              <a:shade val="50000"/>
+            </a:schemeClr>
+          </a:lnRef>
+          <a:fillRef idx="1">
+            <a:schemeClr val="accent1"/>
+          </a:fillRef>
+          <a:effectRef idx="0">
+            <a:schemeClr val="accent1"/>
+          </a:effectRef>
+          <a:fontRef idx="minor">
+            <a:schemeClr val="lt1"/>
+          </a:fontRef>
+        </p:style>
+        <p:txBody>
+          <a:bodyPr rtlCol="0" anchor="ctr"/>
+          <a:lstStyle/>
+          <a:p>
+            <a:pPr algn="ctr"/>
+            <a:r>
+              <a:rPr lang="ko-KR" altLang="en-US" sz="5400" dirty="0" smtClean="0"/>
+              <a:t>게임 화면</a:t>
+            </a:r>
+            <a:endParaRPr lang="ko-KR" altLang="en-US" sz="5400" dirty="0"/>
+          </a:p>
+        </p:txBody>
+      </p:sp>
       <p:pic>
         <p:nvPicPr>
-          <p:cNvPr name="Picture 13" id="13"/>
+          <p:cNvPr id="31" name="그림 30"/>
           <p:cNvPicPr>
-            <a:picLocks noChangeAspect="true"/>
+            <a:picLocks noChangeAspect="1"/>
           </p:cNvPicPr>
           <p:nvPr/>
         </p:nvPicPr>
@@ -3355,9 +4166,9 @@
           </a:stretch>
         </p:blipFill>
         <p:spPr>
-          <a:xfrm rot="0">
-            <a:off x="774700" y="10414000"/>
-            <a:ext cx="4089400" cy="736600"/>
+          <a:xfrm>
+            <a:off x="1299467" y="6573351"/>
+            <a:ext cx="3001767" cy="3004933"/>
           </a:xfrm>
           <a:prstGeom prst="rect">
             <a:avLst/>
@@ -3366,9 +4177,9 @@
       </p:pic>
       <p:pic>
         <p:nvPicPr>
-          <p:cNvPr name="Picture 14" id="14"/>
+          <p:cNvPr id="33" name="그림 32"/>
           <p:cNvPicPr>
-            <a:picLocks noChangeAspect="true"/>
+            <a:picLocks noChangeAspect="1"/>
           </p:cNvPicPr>
           <p:nvPr/>
         </p:nvPicPr>
@@ -3379,9 +4190,58 @@
           </a:stretch>
         </p:blipFill>
         <p:spPr>
-          <a:xfrm rot="0">
-            <a:off x="330200" y="3098800"/>
-            <a:ext cx="1003300" cy="1003300"/>
+          <a:xfrm>
+            <a:off x="12475466" y="7460547"/>
+            <a:ext cx="4413250" cy="2940697"/>
+          </a:xfrm>
+          <a:prstGeom prst="rect">
+            <a:avLst/>
+          </a:prstGeom>
+        </p:spPr>
+      </p:pic>
+    </p:spTree>
+  </p:cSld>
+  <p:clrMapOvr>
+    <a:masterClrMapping/>
+  </p:clrMapOvr>
+</p:sld>
+</file>
+
+<file path=ppt/slides/slide2.xml><?xml version="1.0" encoding="utf-8"?>
+<p:sld xmlns:a="http://schemas.openxmlformats.org/drawingml/2006/main" xmlns:r="http://schemas.openxmlformats.org/officeDocument/2006/relationships" xmlns:p="http://schemas.openxmlformats.org/presentationml/2006/main">
+  <p:cSld>
+    <p:spTree>
+      <p:nvGrpSpPr>
+        <p:cNvPr id="1" name=""/>
+        <p:cNvGrpSpPr/>
+        <p:nvPr/>
+      </p:nvGrpSpPr>
+      <p:grpSpPr>
+        <a:xfrm>
+          <a:off x="0" y="0"/>
+          <a:ext cx="0" cy="0"/>
+          <a:chOff x="0" y="0"/>
+          <a:chExt cx="0" cy="0"/>
+        </a:xfrm>
+      </p:grpSpPr>
+      <p:pic>
+        <p:nvPicPr>
+          <p:cNvPr id="2" name="Picture 2"/>
+          <p:cNvPicPr>
+            <a:picLocks noChangeAspect="1"/>
+          </p:cNvPicPr>
+          <p:nvPr/>
+        </p:nvPicPr>
+        <p:blipFill>
+          <a:blip r:embed="rId2"/>
+          <a:stretch>
+            <a:fillRect/>
+          </a:stretch>
+        </p:blipFill>
+        <p:spPr>
+          <a:xfrm>
+            <a:off x="0" y="0"/>
+            <a:ext cx="11315700" cy="16002000"/>
           </a:xfrm>
           <a:prstGeom prst="rect">
             <a:avLst/>
@@ -3390,9 +4250,1731 @@
       </p:pic>
       <p:pic>
         <p:nvPicPr>
-          <p:cNvPr name="Picture 15" id="15"/>
+          <p:cNvPr id="3" name="Picture 3"/>
           <p:cNvPicPr>
-            <a:picLocks noChangeAspect="true"/>
+            <a:picLocks noChangeAspect="1"/>
+          </p:cNvPicPr>
+          <p:nvPr/>
+        </p:nvPicPr>
+        <p:blipFill>
+          <a:blip r:embed="rId3"/>
+          <a:stretch>
+            <a:fillRect/>
+          </a:stretch>
+        </p:blipFill>
+        <p:spPr>
+          <a:xfrm>
+            <a:off x="0" y="15036800"/>
+            <a:ext cx="11315700" cy="977900"/>
+          </a:xfrm>
+          <a:prstGeom prst="rect">
+            <a:avLst/>
+          </a:prstGeom>
+        </p:spPr>
+      </p:pic>
+      <p:pic>
+        <p:nvPicPr>
+          <p:cNvPr id="4" name="Picture 4"/>
+          <p:cNvPicPr>
+            <a:picLocks noChangeAspect="1"/>
+          </p:cNvPicPr>
+          <p:nvPr/>
+        </p:nvPicPr>
+        <p:blipFill>
+          <a:blip r:embed="rId4"/>
+          <a:stretch>
+            <a:fillRect/>
+          </a:stretch>
+        </p:blipFill>
+        <p:spPr>
+          <a:xfrm>
+            <a:off x="0" y="-25400"/>
+            <a:ext cx="11315700" cy="2755900"/>
+          </a:xfrm>
+          <a:prstGeom prst="rect">
+            <a:avLst/>
+          </a:prstGeom>
+        </p:spPr>
+      </p:pic>
+      <p:pic>
+        <p:nvPicPr>
+          <p:cNvPr id="5" name="Picture 5"/>
+          <p:cNvPicPr>
+            <a:picLocks noChangeAspect="1"/>
+          </p:cNvPicPr>
+          <p:nvPr/>
+        </p:nvPicPr>
+        <p:blipFill>
+          <a:blip r:embed="rId5"/>
+          <a:stretch>
+            <a:fillRect/>
+          </a:stretch>
+        </p:blipFill>
+        <p:spPr>
+          <a:xfrm rot="10800000">
+            <a:off x="7023100" y="0"/>
+            <a:ext cx="4292600" cy="2730500"/>
+          </a:xfrm>
+          <a:prstGeom prst="rect">
+            <a:avLst/>
+          </a:prstGeom>
+        </p:spPr>
+      </p:pic>
+      <p:pic>
+        <p:nvPicPr>
+          <p:cNvPr id="6" name="Picture 6"/>
+          <p:cNvPicPr>
+            <a:picLocks noChangeAspect="1"/>
+          </p:cNvPicPr>
+          <p:nvPr/>
+        </p:nvPicPr>
+        <p:blipFill>
+          <a:blip r:embed="rId6"/>
+          <a:stretch>
+            <a:fillRect/>
+          </a:stretch>
+        </p:blipFill>
+        <p:spPr>
+          <a:xfrm rot="10800000">
+            <a:off x="0" y="-12700"/>
+            <a:ext cx="3962400" cy="2730500"/>
+          </a:xfrm>
+          <a:prstGeom prst="rect">
+            <a:avLst/>
+          </a:prstGeom>
+        </p:spPr>
+      </p:pic>
+      <p:pic>
+        <p:nvPicPr>
+          <p:cNvPr id="11" name="Picture 11"/>
+          <p:cNvPicPr>
+            <a:picLocks noChangeAspect="1"/>
+          </p:cNvPicPr>
+          <p:nvPr/>
+        </p:nvPicPr>
+        <p:blipFill>
+          <a:blip r:embed="rId7"/>
+          <a:stretch>
+            <a:fillRect/>
+          </a:stretch>
+        </p:blipFill>
+        <p:spPr>
+          <a:xfrm>
+            <a:off x="774700" y="3225800"/>
+            <a:ext cx="9791700" cy="736600"/>
+          </a:xfrm>
+          <a:prstGeom prst="rect">
+            <a:avLst/>
+          </a:prstGeom>
+        </p:spPr>
+      </p:pic>
+      <p:pic>
+        <p:nvPicPr>
+          <p:cNvPr id="14" name="Picture 14"/>
+          <p:cNvPicPr>
+            <a:picLocks noChangeAspect="1"/>
+          </p:cNvPicPr>
+          <p:nvPr/>
+        </p:nvPicPr>
+        <p:blipFill>
+          <a:blip r:embed="rId8"/>
+          <a:stretch>
+            <a:fillRect/>
+          </a:stretch>
+        </p:blipFill>
+        <p:spPr>
+          <a:xfrm>
+            <a:off x="330200" y="3098800"/>
+            <a:ext cx="1003300" cy="1003300"/>
+          </a:xfrm>
+          <a:prstGeom prst="rect">
+            <a:avLst/>
+          </a:prstGeom>
+        </p:spPr>
+      </p:pic>
+      <p:sp>
+        <p:nvSpPr>
+          <p:cNvPr id="23" name="TextBox 23"/>
+          <p:cNvSpPr txBox="1"/>
+          <p:nvPr/>
+        </p:nvSpPr>
+        <p:spPr>
+          <a:xfrm>
+            <a:off x="1270000" y="3327400"/>
+            <a:ext cx="8877300" cy="571500"/>
+          </a:xfrm>
+          <a:prstGeom prst="rect">
+            <a:avLst/>
+          </a:prstGeom>
+        </p:spPr>
+        <p:txBody>
+          <a:bodyPr lIns="0" tIns="40640" rIns="0" bIns="0" rtlCol="0" anchor="t"/>
+          <a:lstStyle/>
+          <a:p>
+            <a:pPr lvl="0" algn="ctr">
+              <a:lnSpc>
+                <a:spcPct val="99600"/>
+              </a:lnSpc>
+            </a:pPr>
+            <a:r>
+              <a:rPr lang="en-US" sz="3200" b="0" i="0" u="none" strike="noStrike" dirty="0" smtClean="0">
+                <a:solidFill>
+                  <a:srgbClr val="FAFAFA"/>
+                </a:solidFill>
+                <a:latin typeface="LG스마트체2.0 Bold" panose="020B0600000101010101" pitchFamily="50" charset="-127"/>
+                <a:ea typeface="LG스마트체2.0 Bold" panose="020B0600000101010101" pitchFamily="50" charset="-127"/>
+                <a:cs typeface="Montserrat Bold"/>
+              </a:rPr>
+              <a:t>HOW TO PLAY</a:t>
+            </a:r>
+            <a:endParaRPr lang="en-US" sz="3200" b="0" i="0" u="none" strike="noStrike" dirty="0">
+              <a:solidFill>
+                <a:srgbClr val="FAFAFA"/>
+              </a:solidFill>
+              <a:latin typeface="LG스마트체2.0 Bold" panose="020B0600000101010101" pitchFamily="50" charset="-127"/>
+              <a:ea typeface="LG스마트체2.0 Bold" panose="020B0600000101010101" pitchFamily="50" charset="-127"/>
+              <a:cs typeface="Montserrat Bold"/>
+            </a:endParaRPr>
+          </a:p>
+        </p:txBody>
+      </p:sp>
+      <p:sp>
+        <p:nvSpPr>
+          <p:cNvPr id="26" name="TextBox 26"/>
+          <p:cNvSpPr txBox="1"/>
+          <p:nvPr/>
+        </p:nvSpPr>
+        <p:spPr>
+          <a:xfrm>
+            <a:off x="546100" y="3327400"/>
+            <a:ext cx="584200" cy="571500"/>
+          </a:xfrm>
+          <a:prstGeom prst="rect">
+            <a:avLst/>
+          </a:prstGeom>
+        </p:spPr>
+        <p:txBody>
+          <a:bodyPr lIns="0" tIns="40640" rIns="0" bIns="0" rtlCol="0" anchor="t"/>
+          <a:lstStyle/>
+          <a:p>
+            <a:pPr lvl="0" algn="ctr">
+              <a:lnSpc>
+                <a:spcPct val="99600"/>
+              </a:lnSpc>
+            </a:pPr>
+            <a:r>
+              <a:rPr lang="en-US" sz="3200" b="0" i="0" u="none" strike="noStrike" dirty="0" smtClean="0">
+                <a:solidFill>
+                  <a:srgbClr val="FAFAFA"/>
+                </a:solidFill>
+                <a:latin typeface="LG스마트체2.0 Bold" panose="020B0600000101010101" pitchFamily="50" charset="-127"/>
+                <a:ea typeface="LG스마트체2.0 Bold" panose="020B0600000101010101" pitchFamily="50" charset="-127"/>
+                <a:cs typeface="Montserrat Bold"/>
+              </a:rPr>
+              <a:t>04</a:t>
+            </a:r>
+            <a:endParaRPr lang="en-US" sz="3200" b="0" i="0" u="none" strike="noStrike" dirty="0">
+              <a:solidFill>
+                <a:srgbClr val="FAFAFA"/>
+              </a:solidFill>
+              <a:latin typeface="LG스마트체2.0 Bold" panose="020B0600000101010101" pitchFamily="50" charset="-127"/>
+              <a:ea typeface="LG스마트체2.0 Bold" panose="020B0600000101010101" pitchFamily="50" charset="-127"/>
+              <a:cs typeface="Montserrat Bold"/>
+            </a:endParaRPr>
+          </a:p>
+        </p:txBody>
+      </p:sp>
+      <p:sp>
+        <p:nvSpPr>
+          <p:cNvPr id="29" name="TextBox 27"/>
+          <p:cNvSpPr txBox="1"/>
+          <p:nvPr/>
+        </p:nvSpPr>
+        <p:spPr>
+          <a:xfrm>
+            <a:off x="736600" y="533400"/>
+            <a:ext cx="9829800" cy="1384300"/>
+          </a:xfrm>
+          <a:prstGeom prst="rect">
+            <a:avLst/>
+          </a:prstGeom>
+        </p:spPr>
+        <p:txBody>
+          <a:bodyPr lIns="0" tIns="115146" rIns="0" bIns="0" rtlCol="0" anchor="t"/>
+          <a:lstStyle/>
+          <a:p>
+            <a:pPr lvl="0" algn="ctr">
+              <a:lnSpc>
+                <a:spcPct val="83000"/>
+              </a:lnSpc>
+            </a:pPr>
+            <a:r>
+              <a:rPr lang="ko-KR" altLang="en-US" sz="4533" dirty="0">
+                <a:solidFill>
+                  <a:srgbClr val="FAFAFA"/>
+                </a:solidFill>
+                <a:latin typeface="LG스마트체2.0 SemiBold" panose="020B0600000101010101" pitchFamily="50" charset="-127"/>
+                <a:ea typeface="LG스마트체2.0 SemiBold" panose="020B0600000101010101" pitchFamily="50" charset="-127"/>
+                <a:cs typeface="Montserrat Bold"/>
+              </a:rPr>
+              <a:t>다중 클라이언트 실시간 </a:t>
+            </a:r>
+            <a:r>
+              <a:rPr lang="en-US" altLang="ko-KR" sz="4533" dirty="0">
+                <a:solidFill>
+                  <a:srgbClr val="FAFAFA"/>
+                </a:solidFill>
+                <a:latin typeface="LG스마트체2.0 SemiBold" panose="020B0600000101010101" pitchFamily="50" charset="-127"/>
+                <a:ea typeface="LG스마트체2.0 SemiBold" panose="020B0600000101010101" pitchFamily="50" charset="-127"/>
+                <a:cs typeface="Montserrat Bold"/>
+              </a:rPr>
+              <a:t>UDP </a:t>
+            </a:r>
+            <a:r>
+              <a:rPr lang="ko-KR" altLang="en-US" sz="4533" smtClean="0">
+                <a:solidFill>
+                  <a:srgbClr val="FAFAFA"/>
+                </a:solidFill>
+                <a:latin typeface="LG스마트체2.0 SemiBold" panose="020B0600000101010101" pitchFamily="50" charset="-127"/>
+                <a:ea typeface="LG스마트체2.0 SemiBold" panose="020B0600000101010101" pitchFamily="50" charset="-127"/>
+                <a:cs typeface="Montserrat Bold"/>
+              </a:rPr>
+              <a:t>통신을</a:t>
+            </a:r>
+            <a:r>
+              <a:rPr lang="en-US" altLang="ko-KR" sz="4533" dirty="0" smtClean="0">
+                <a:solidFill>
+                  <a:srgbClr val="FAFAFA"/>
+                </a:solidFill>
+                <a:latin typeface="LG스마트체2.0 SemiBold" panose="020B0600000101010101" pitchFamily="50" charset="-127"/>
+                <a:ea typeface="LG스마트체2.0 SemiBold" panose="020B0600000101010101" pitchFamily="50" charset="-127"/>
+                <a:cs typeface="Montserrat Bold"/>
+              </a:rPr>
+              <a:t> </a:t>
+            </a:r>
+            <a:r>
+              <a:rPr lang="ko-KR" altLang="en-US" sz="4533" smtClean="0">
+                <a:solidFill>
+                  <a:srgbClr val="FAFAFA"/>
+                </a:solidFill>
+                <a:latin typeface="LG스마트체2.0 SemiBold" panose="020B0600000101010101" pitchFamily="50" charset="-127"/>
+                <a:ea typeface="LG스마트체2.0 SemiBold" panose="020B0600000101010101" pitchFamily="50" charset="-127"/>
+                <a:cs typeface="Montserrat Bold"/>
+              </a:rPr>
+              <a:t>활용한 </a:t>
+            </a:r>
+            <a:r>
+              <a:rPr lang="ko-KR" altLang="en-US" sz="4533" b="0" i="0" u="none" strike="noStrike" smtClean="0">
+                <a:solidFill>
+                  <a:srgbClr val="FAFAFA"/>
+                </a:solidFill>
+                <a:latin typeface="LG스마트체2.0 SemiBold" panose="020B0600000101010101" pitchFamily="50" charset="-127"/>
+                <a:ea typeface="LG스마트체2.0 SemiBold" panose="020B0600000101010101" pitchFamily="50" charset="-127"/>
+                <a:cs typeface="Montserrat Bold"/>
+              </a:rPr>
+              <a:t>쿵야 캐치 마인드 게임 구현</a:t>
+            </a:r>
+            <a:endParaRPr lang="en-US" sz="4533" b="0" i="0" u="none" strike="noStrike" dirty="0">
+              <a:solidFill>
+                <a:srgbClr val="FAFAFA"/>
+              </a:solidFill>
+              <a:latin typeface="LG스마트체2.0 SemiBold" panose="020B0600000101010101" pitchFamily="50" charset="-127"/>
+              <a:ea typeface="LG스마트체2.0 SemiBold" panose="020B0600000101010101" pitchFamily="50" charset="-127"/>
+              <a:cs typeface="Montserrat Bold"/>
+            </a:endParaRPr>
+          </a:p>
+        </p:txBody>
+      </p:sp>
+      <p:sp>
+        <p:nvSpPr>
+          <p:cNvPr id="30" name="TextBox 28"/>
+          <p:cNvSpPr txBox="1"/>
+          <p:nvPr/>
+        </p:nvSpPr>
+        <p:spPr>
+          <a:xfrm>
+            <a:off x="1181100" y="1993900"/>
+            <a:ext cx="8966200" cy="431800"/>
+          </a:xfrm>
+          <a:prstGeom prst="rect">
+            <a:avLst/>
+          </a:prstGeom>
+        </p:spPr>
+        <p:txBody>
+          <a:bodyPr lIns="0" tIns="30480" rIns="0" bIns="0" rtlCol="0" anchor="t"/>
+          <a:lstStyle/>
+          <a:p>
+            <a:pPr lvl="0" algn="r">
+              <a:lnSpc>
+                <a:spcPct val="99600"/>
+              </a:lnSpc>
+            </a:pPr>
+            <a:r>
+              <a:rPr lang="ko-KR" altLang="en-US" sz="2400" b="0" i="0" u="none" strike="noStrike" dirty="0" smtClean="0">
+                <a:solidFill>
+                  <a:srgbClr val="FAFAFA"/>
+                </a:solidFill>
+                <a:latin typeface="LG스마트체2.0 Regular" panose="020B0600000101010101" pitchFamily="50" charset="-127"/>
+                <a:ea typeface="LG스마트체2.0 Regular" panose="020B0600000101010101" pitchFamily="50" charset="-127"/>
+                <a:cs typeface="Work Sans Regular"/>
+              </a:rPr>
+              <a:t>소속</a:t>
+            </a:r>
+            <a:r>
+              <a:rPr lang="en-US" altLang="ko-KR" sz="2400" dirty="0">
+                <a:solidFill>
+                  <a:srgbClr val="FAFAFA"/>
+                </a:solidFill>
+                <a:latin typeface="LG스마트체2.0 Regular" panose="020B0600000101010101" pitchFamily="50" charset="-127"/>
+                <a:ea typeface="LG스마트체2.0 Regular" panose="020B0600000101010101" pitchFamily="50" charset="-127"/>
+                <a:cs typeface="Work Sans Regular"/>
+              </a:rPr>
+              <a:t>/</a:t>
+            </a:r>
+            <a:r>
+              <a:rPr lang="ko-KR" altLang="en-US" sz="2400" b="0" i="0" u="none" strike="noStrike" smtClean="0">
+                <a:solidFill>
+                  <a:srgbClr val="FAFAFA"/>
+                </a:solidFill>
+                <a:latin typeface="LG스마트체2.0 Regular" panose="020B0600000101010101" pitchFamily="50" charset="-127"/>
+                <a:ea typeface="LG스마트체2.0 Regular" panose="020B0600000101010101" pitchFamily="50" charset="-127"/>
+                <a:cs typeface="Work Sans Regular"/>
+              </a:rPr>
+              <a:t>성명 </a:t>
+            </a:r>
+            <a:r>
+              <a:rPr lang="en-US" altLang="ko-KR" sz="2400" b="0" i="0" u="none" strike="noStrike" dirty="0" smtClean="0">
+                <a:solidFill>
+                  <a:srgbClr val="FAFAFA"/>
+                </a:solidFill>
+                <a:latin typeface="LG스마트체2.0 Regular" panose="020B0600000101010101" pitchFamily="50" charset="-127"/>
+                <a:ea typeface="LG스마트체2.0 Regular" panose="020B0600000101010101" pitchFamily="50" charset="-127"/>
+                <a:cs typeface="Work Sans Regular"/>
+              </a:rPr>
+              <a:t>: </a:t>
+            </a:r>
+            <a:r>
+              <a:rPr lang="ko-KR" altLang="en-US" sz="2400" b="0" i="0" u="none" strike="noStrike" smtClean="0">
+                <a:solidFill>
+                  <a:srgbClr val="FAFAFA"/>
+                </a:solidFill>
+                <a:latin typeface="LG스마트체2.0 Regular" panose="020B0600000101010101" pitchFamily="50" charset="-127"/>
+                <a:ea typeface="LG스마트체2.0 Regular" panose="020B0600000101010101" pitchFamily="50" charset="-127"/>
+                <a:cs typeface="Work Sans Regular"/>
+              </a:rPr>
+              <a:t>엄제원</a:t>
+            </a:r>
+            <a:r>
+              <a:rPr lang="en-US" altLang="ko-KR" sz="2400" b="0" i="0" u="none" strike="noStrike" dirty="0" smtClean="0">
+                <a:solidFill>
+                  <a:srgbClr val="FAFAFA"/>
+                </a:solidFill>
+                <a:latin typeface="LG스마트체2.0 Regular" panose="020B0600000101010101" pitchFamily="50" charset="-127"/>
+                <a:ea typeface="LG스마트체2.0 Regular" panose="020B0600000101010101" pitchFamily="50" charset="-127"/>
+                <a:cs typeface="Work Sans Regular"/>
+              </a:rPr>
+              <a:t>, </a:t>
+            </a:r>
+            <a:r>
+              <a:rPr lang="ko-KR" altLang="en-US" sz="2400" b="0" i="0" u="none" strike="noStrike" smtClean="0">
+                <a:solidFill>
+                  <a:srgbClr val="FAFAFA"/>
+                </a:solidFill>
+                <a:latin typeface="LG스마트체2.0 Regular" panose="020B0600000101010101" pitchFamily="50" charset="-127"/>
+                <a:ea typeface="LG스마트체2.0 Regular" panose="020B0600000101010101" pitchFamily="50" charset="-127"/>
+                <a:cs typeface="Work Sans Regular"/>
+              </a:rPr>
+              <a:t>이경환</a:t>
+            </a:r>
+            <a:r>
+              <a:rPr lang="en-US" altLang="ko-KR" sz="2400" b="0" i="0" u="none" strike="noStrike" dirty="0" smtClean="0">
+                <a:solidFill>
+                  <a:srgbClr val="FAFAFA"/>
+                </a:solidFill>
+                <a:latin typeface="LG스마트체2.0 Regular" panose="020B0600000101010101" pitchFamily="50" charset="-127"/>
+                <a:ea typeface="LG스마트체2.0 Regular" panose="020B0600000101010101" pitchFamily="50" charset="-127"/>
+                <a:cs typeface="Work Sans Regular"/>
+              </a:rPr>
+              <a:t>, </a:t>
+            </a:r>
+            <a:r>
+              <a:rPr lang="ko-KR" altLang="en-US" sz="2400" b="0" i="0" u="none" strike="noStrike" smtClean="0">
+                <a:solidFill>
+                  <a:srgbClr val="FAFAFA"/>
+                </a:solidFill>
+                <a:latin typeface="LG스마트체2.0 Regular" panose="020B0600000101010101" pitchFamily="50" charset="-127"/>
+                <a:ea typeface="LG스마트체2.0 Regular" panose="020B0600000101010101" pitchFamily="50" charset="-127"/>
+                <a:cs typeface="Work Sans Regular"/>
+              </a:rPr>
+              <a:t>윤지원</a:t>
+            </a:r>
+            <a:r>
+              <a:rPr lang="en-US" altLang="ko-KR" sz="2400" b="0" i="0" u="none" strike="noStrike" dirty="0" smtClean="0">
+                <a:solidFill>
+                  <a:srgbClr val="FAFAFA"/>
+                </a:solidFill>
+                <a:latin typeface="LG스마트체2.0 Regular" panose="020B0600000101010101" pitchFamily="50" charset="-127"/>
+                <a:ea typeface="LG스마트체2.0 Regular" panose="020B0600000101010101" pitchFamily="50" charset="-127"/>
+                <a:cs typeface="Work Sans Regular"/>
+              </a:rPr>
+              <a:t> </a:t>
+            </a:r>
+            <a:endParaRPr lang="en-US" sz="2400" b="0" i="0" u="none" strike="noStrike" dirty="0">
+              <a:solidFill>
+                <a:srgbClr val="FAFAFA"/>
+              </a:solidFill>
+              <a:latin typeface="LG스마트체2.0 Regular" panose="020B0600000101010101" pitchFamily="50" charset="-127"/>
+              <a:ea typeface="LG스마트체2.0 Regular" panose="020B0600000101010101" pitchFamily="50" charset="-127"/>
+              <a:cs typeface="Work Sans Regular"/>
+            </a:endParaRPr>
+          </a:p>
+        </p:txBody>
+      </p:sp>
+      <p:sp>
+        <p:nvSpPr>
+          <p:cNvPr id="31" name="TextBox 17"/>
+          <p:cNvSpPr txBox="1"/>
+          <p:nvPr/>
+        </p:nvSpPr>
+        <p:spPr>
+          <a:xfrm>
+            <a:off x="3022600" y="15379700"/>
+            <a:ext cx="5283200" cy="330200"/>
+          </a:xfrm>
+          <a:prstGeom prst="rect">
+            <a:avLst/>
+          </a:prstGeom>
+        </p:spPr>
+        <p:txBody>
+          <a:bodyPr lIns="0" tIns="23707" rIns="0" bIns="0" rtlCol="0" anchor="t"/>
+          <a:lstStyle/>
+          <a:p>
+            <a:pPr lvl="0" algn="ctr">
+              <a:lnSpc>
+                <a:spcPct val="99600"/>
+              </a:lnSpc>
+            </a:pPr>
+            <a:r>
+              <a:rPr lang="en-US" sz="1866" b="1" dirty="0" smtClean="0">
+                <a:solidFill>
+                  <a:srgbClr val="FAFAFA"/>
+                </a:solidFill>
+                <a:latin typeface="LG스마트체2.0 Bold" panose="020B0600000101010101" pitchFamily="50" charset="-127"/>
+                <a:ea typeface="LG스마트체2.0 Bold" panose="020B0600000101010101" pitchFamily="50" charset="-127"/>
+                <a:cs typeface="Montserrat Bold"/>
+              </a:rPr>
+              <a:t>LG ELECTRONICS</a:t>
+            </a:r>
+            <a:endParaRPr lang="en-US" sz="1866" b="1" i="0" u="none" strike="noStrike" dirty="0">
+              <a:solidFill>
+                <a:srgbClr val="FAFAFA"/>
+              </a:solidFill>
+              <a:latin typeface="LG스마트체2.0 Bold" panose="020B0600000101010101" pitchFamily="50" charset="-127"/>
+              <a:ea typeface="LG스마트체2.0 Bold" panose="020B0600000101010101" pitchFamily="50" charset="-127"/>
+              <a:cs typeface="Montserrat Bold"/>
+            </a:endParaRPr>
+          </a:p>
+        </p:txBody>
+      </p:sp>
+      <p:pic>
+        <p:nvPicPr>
+          <p:cNvPr id="32" name="그림 31"/>
+          <p:cNvPicPr>
+            <a:picLocks noChangeAspect="1"/>
+          </p:cNvPicPr>
+          <p:nvPr/>
+        </p:nvPicPr>
+        <p:blipFill>
+          <a:blip r:embed="rId9">
+            <a:extLst>
+              <a:ext uri="{28A0092B-C50C-407E-A947-70E740481C1C}">
+                <a14:useLocalDpi xmlns:a14="http://schemas.microsoft.com/office/drawing/2010/main" val="0"/>
+              </a:ext>
+            </a:extLst>
+          </a:blip>
+          <a:stretch>
+            <a:fillRect/>
+          </a:stretch>
+        </p:blipFill>
+        <p:spPr>
+          <a:xfrm>
+            <a:off x="374650" y="4902199"/>
+            <a:ext cx="10566400" cy="8763001"/>
+          </a:xfrm>
+          <a:prstGeom prst="rect">
+            <a:avLst/>
+          </a:prstGeom>
+        </p:spPr>
+      </p:pic>
+    </p:spTree>
+    <p:extLst>
+      <p:ext uri="{BB962C8B-B14F-4D97-AF65-F5344CB8AC3E}">
+        <p14:creationId xmlns:p14="http://schemas.microsoft.com/office/powerpoint/2010/main" val="2568795034"/>
+      </p:ext>
+    </p:extLst>
+  </p:cSld>
+  <p:clrMapOvr>
+    <a:masterClrMapping/>
+  </p:clrMapOvr>
+</p:sld>
+</file>
+
+<file path=ppt/slides/slide3.xml><?xml version="1.0" encoding="utf-8"?>
+<p:sld xmlns:a="http://schemas.openxmlformats.org/drawingml/2006/main" xmlns:r="http://schemas.openxmlformats.org/officeDocument/2006/relationships" xmlns:p="http://schemas.openxmlformats.org/presentationml/2006/main">
+  <p:cSld>
+    <p:spTree>
+      <p:nvGrpSpPr>
+        <p:cNvPr id="1" name=""/>
+        <p:cNvGrpSpPr/>
+        <p:nvPr/>
+      </p:nvGrpSpPr>
+      <p:grpSpPr>
+        <a:xfrm>
+          <a:off x="0" y="0"/>
+          <a:ext cx="0" cy="0"/>
+          <a:chOff x="0" y="0"/>
+          <a:chExt cx="0" cy="0"/>
+        </a:xfrm>
+      </p:grpSpPr>
+      <p:pic>
+        <p:nvPicPr>
+          <p:cNvPr id="2" name="Picture 2"/>
+          <p:cNvPicPr>
+            <a:picLocks noChangeAspect="1"/>
+          </p:cNvPicPr>
+          <p:nvPr/>
+        </p:nvPicPr>
+        <p:blipFill>
+          <a:blip r:embed="rId2"/>
+          <a:stretch>
+            <a:fillRect/>
+          </a:stretch>
+        </p:blipFill>
+        <p:spPr>
+          <a:xfrm>
+            <a:off x="0" y="0"/>
+            <a:ext cx="11315700" cy="16002000"/>
+          </a:xfrm>
+          <a:prstGeom prst="rect">
+            <a:avLst/>
+          </a:prstGeom>
+        </p:spPr>
+      </p:pic>
+      <p:pic>
+        <p:nvPicPr>
+          <p:cNvPr id="3" name="Picture 3"/>
+          <p:cNvPicPr>
+            <a:picLocks noChangeAspect="1"/>
+          </p:cNvPicPr>
+          <p:nvPr/>
+        </p:nvPicPr>
+        <p:blipFill>
+          <a:blip r:embed="rId3"/>
+          <a:stretch>
+            <a:fillRect/>
+          </a:stretch>
+        </p:blipFill>
+        <p:spPr>
+          <a:xfrm>
+            <a:off x="0" y="15036800"/>
+            <a:ext cx="11315700" cy="977900"/>
+          </a:xfrm>
+          <a:prstGeom prst="rect">
+            <a:avLst/>
+          </a:prstGeom>
+        </p:spPr>
+      </p:pic>
+      <p:pic>
+        <p:nvPicPr>
+          <p:cNvPr id="4" name="Picture 4"/>
+          <p:cNvPicPr>
+            <a:picLocks noChangeAspect="1"/>
+          </p:cNvPicPr>
+          <p:nvPr/>
+        </p:nvPicPr>
+        <p:blipFill>
+          <a:blip r:embed="rId4"/>
+          <a:stretch>
+            <a:fillRect/>
+          </a:stretch>
+        </p:blipFill>
+        <p:spPr>
+          <a:xfrm>
+            <a:off x="0" y="-25400"/>
+            <a:ext cx="11315700" cy="2755900"/>
+          </a:xfrm>
+          <a:prstGeom prst="rect">
+            <a:avLst/>
+          </a:prstGeom>
+        </p:spPr>
+      </p:pic>
+      <p:pic>
+        <p:nvPicPr>
+          <p:cNvPr id="5" name="Picture 5"/>
+          <p:cNvPicPr>
+            <a:picLocks noChangeAspect="1"/>
+          </p:cNvPicPr>
+          <p:nvPr/>
+        </p:nvPicPr>
+        <p:blipFill>
+          <a:blip r:embed="rId5"/>
+          <a:stretch>
+            <a:fillRect/>
+          </a:stretch>
+        </p:blipFill>
+        <p:spPr>
+          <a:xfrm rot="10800000">
+            <a:off x="7023100" y="0"/>
+            <a:ext cx="4292600" cy="2730500"/>
+          </a:xfrm>
+          <a:prstGeom prst="rect">
+            <a:avLst/>
+          </a:prstGeom>
+        </p:spPr>
+      </p:pic>
+      <p:pic>
+        <p:nvPicPr>
+          <p:cNvPr id="6" name="Picture 6"/>
+          <p:cNvPicPr>
+            <a:picLocks noChangeAspect="1"/>
+          </p:cNvPicPr>
+          <p:nvPr/>
+        </p:nvPicPr>
+        <p:blipFill>
+          <a:blip r:embed="rId6"/>
+          <a:stretch>
+            <a:fillRect/>
+          </a:stretch>
+        </p:blipFill>
+        <p:spPr>
+          <a:xfrm rot="10800000">
+            <a:off x="0" y="-12700"/>
+            <a:ext cx="3962400" cy="2730500"/>
+          </a:xfrm>
+          <a:prstGeom prst="rect">
+            <a:avLst/>
+          </a:prstGeom>
+        </p:spPr>
+      </p:pic>
+      <p:pic>
+        <p:nvPicPr>
+          <p:cNvPr id="11" name="Picture 11"/>
+          <p:cNvPicPr>
+            <a:picLocks noChangeAspect="1"/>
+          </p:cNvPicPr>
+          <p:nvPr/>
+        </p:nvPicPr>
+        <p:blipFill>
+          <a:blip r:embed="rId7"/>
+          <a:stretch>
+            <a:fillRect/>
+          </a:stretch>
+        </p:blipFill>
+        <p:spPr>
+          <a:xfrm>
+            <a:off x="774700" y="3225800"/>
+            <a:ext cx="9791700" cy="736600"/>
+          </a:xfrm>
+          <a:prstGeom prst="rect">
+            <a:avLst/>
+          </a:prstGeom>
+        </p:spPr>
+      </p:pic>
+      <p:pic>
+        <p:nvPicPr>
+          <p:cNvPr id="14" name="Picture 14"/>
+          <p:cNvPicPr>
+            <a:picLocks noChangeAspect="1"/>
+          </p:cNvPicPr>
+          <p:nvPr/>
+        </p:nvPicPr>
+        <p:blipFill>
+          <a:blip r:embed="rId8"/>
+          <a:stretch>
+            <a:fillRect/>
+          </a:stretch>
+        </p:blipFill>
+        <p:spPr>
+          <a:xfrm>
+            <a:off x="330200" y="3098800"/>
+            <a:ext cx="1003300" cy="1003300"/>
+          </a:xfrm>
+          <a:prstGeom prst="rect">
+            <a:avLst/>
+          </a:prstGeom>
+        </p:spPr>
+      </p:pic>
+      <p:sp>
+        <p:nvSpPr>
+          <p:cNvPr id="23" name="TextBox 23"/>
+          <p:cNvSpPr txBox="1"/>
+          <p:nvPr/>
+        </p:nvSpPr>
+        <p:spPr>
+          <a:xfrm>
+            <a:off x="1270000" y="3327400"/>
+            <a:ext cx="8877300" cy="571500"/>
+          </a:xfrm>
+          <a:prstGeom prst="rect">
+            <a:avLst/>
+          </a:prstGeom>
+        </p:spPr>
+        <p:txBody>
+          <a:bodyPr lIns="0" tIns="40640" rIns="0" bIns="0" rtlCol="0" anchor="t"/>
+          <a:lstStyle/>
+          <a:p>
+            <a:pPr lvl="0" algn="ctr">
+              <a:lnSpc>
+                <a:spcPct val="99600"/>
+              </a:lnSpc>
+            </a:pPr>
+            <a:r>
+              <a:rPr lang="ko-KR" altLang="en-US" sz="3200" dirty="0" smtClean="0">
+                <a:solidFill>
+                  <a:srgbClr val="FAFAFA"/>
+                </a:solidFill>
+                <a:latin typeface="LG스마트체2.0 Bold" panose="020B0600000101010101" pitchFamily="50" charset="-127"/>
+                <a:ea typeface="LG스마트체2.0 Bold" panose="020B0600000101010101" pitchFamily="50" charset="-127"/>
+                <a:cs typeface="Montserrat Bold"/>
+              </a:rPr>
+              <a:t>화면 예시</a:t>
+            </a:r>
+            <a:endParaRPr lang="en-US" sz="3200" b="0" i="0" u="none" strike="noStrike" dirty="0">
+              <a:solidFill>
+                <a:srgbClr val="FAFAFA"/>
+              </a:solidFill>
+              <a:latin typeface="LG스마트체2.0 Bold" panose="020B0600000101010101" pitchFamily="50" charset="-127"/>
+              <a:ea typeface="LG스마트체2.0 Bold" panose="020B0600000101010101" pitchFamily="50" charset="-127"/>
+              <a:cs typeface="Montserrat Bold"/>
+            </a:endParaRPr>
+          </a:p>
+        </p:txBody>
+      </p:sp>
+      <p:sp>
+        <p:nvSpPr>
+          <p:cNvPr id="26" name="TextBox 26"/>
+          <p:cNvSpPr txBox="1"/>
+          <p:nvPr/>
+        </p:nvSpPr>
+        <p:spPr>
+          <a:xfrm>
+            <a:off x="546100" y="3327400"/>
+            <a:ext cx="584200" cy="571500"/>
+          </a:xfrm>
+          <a:prstGeom prst="rect">
+            <a:avLst/>
+          </a:prstGeom>
+        </p:spPr>
+        <p:txBody>
+          <a:bodyPr lIns="0" tIns="40640" rIns="0" bIns="0" rtlCol="0" anchor="t"/>
+          <a:lstStyle/>
+          <a:p>
+            <a:pPr lvl="0" algn="ctr">
+              <a:lnSpc>
+                <a:spcPct val="99600"/>
+              </a:lnSpc>
+            </a:pPr>
+            <a:r>
+              <a:rPr lang="en-US" sz="3200" b="0" i="0" u="none" strike="noStrike" dirty="0" smtClean="0">
+                <a:solidFill>
+                  <a:srgbClr val="FAFAFA"/>
+                </a:solidFill>
+                <a:latin typeface="LG스마트체2.0 Bold" panose="020B0600000101010101" pitchFamily="50" charset="-127"/>
+                <a:ea typeface="LG스마트체2.0 Bold" panose="020B0600000101010101" pitchFamily="50" charset="-127"/>
+                <a:cs typeface="Montserrat Bold"/>
+              </a:rPr>
+              <a:t>04</a:t>
+            </a:r>
+            <a:endParaRPr lang="en-US" sz="3200" b="0" i="0" u="none" strike="noStrike" dirty="0">
+              <a:solidFill>
+                <a:srgbClr val="FAFAFA"/>
+              </a:solidFill>
+              <a:latin typeface="LG스마트체2.0 Bold" panose="020B0600000101010101" pitchFamily="50" charset="-127"/>
+              <a:ea typeface="LG스마트체2.0 Bold" panose="020B0600000101010101" pitchFamily="50" charset="-127"/>
+              <a:cs typeface="Montserrat Bold"/>
+            </a:endParaRPr>
+          </a:p>
+        </p:txBody>
+      </p:sp>
+      <p:sp>
+        <p:nvSpPr>
+          <p:cNvPr id="29" name="TextBox 27"/>
+          <p:cNvSpPr txBox="1"/>
+          <p:nvPr/>
+        </p:nvSpPr>
+        <p:spPr>
+          <a:xfrm>
+            <a:off x="736600" y="533400"/>
+            <a:ext cx="9829800" cy="1384300"/>
+          </a:xfrm>
+          <a:prstGeom prst="rect">
+            <a:avLst/>
+          </a:prstGeom>
+        </p:spPr>
+        <p:txBody>
+          <a:bodyPr lIns="0" tIns="115146" rIns="0" bIns="0" rtlCol="0" anchor="t"/>
+          <a:lstStyle/>
+          <a:p>
+            <a:pPr lvl="0" algn="ctr">
+              <a:lnSpc>
+                <a:spcPct val="83000"/>
+              </a:lnSpc>
+            </a:pPr>
+            <a:r>
+              <a:rPr lang="ko-KR" altLang="en-US" sz="4533" dirty="0">
+                <a:solidFill>
+                  <a:srgbClr val="FAFAFA"/>
+                </a:solidFill>
+                <a:latin typeface="LG스마트체2.0 SemiBold" panose="020B0600000101010101" pitchFamily="50" charset="-127"/>
+                <a:ea typeface="LG스마트체2.0 SemiBold" panose="020B0600000101010101" pitchFamily="50" charset="-127"/>
+                <a:cs typeface="Montserrat Bold"/>
+              </a:rPr>
+              <a:t>다중 클라이언트 실시간 </a:t>
+            </a:r>
+            <a:r>
+              <a:rPr lang="en-US" altLang="ko-KR" sz="4533" dirty="0">
+                <a:solidFill>
+                  <a:srgbClr val="FAFAFA"/>
+                </a:solidFill>
+                <a:latin typeface="LG스마트체2.0 SemiBold" panose="020B0600000101010101" pitchFamily="50" charset="-127"/>
+                <a:ea typeface="LG스마트체2.0 SemiBold" panose="020B0600000101010101" pitchFamily="50" charset="-127"/>
+                <a:cs typeface="Montserrat Bold"/>
+              </a:rPr>
+              <a:t>UDP </a:t>
+            </a:r>
+            <a:r>
+              <a:rPr lang="ko-KR" altLang="en-US" sz="4533" smtClean="0">
+                <a:solidFill>
+                  <a:srgbClr val="FAFAFA"/>
+                </a:solidFill>
+                <a:latin typeface="LG스마트체2.0 SemiBold" panose="020B0600000101010101" pitchFamily="50" charset="-127"/>
+                <a:ea typeface="LG스마트체2.0 SemiBold" panose="020B0600000101010101" pitchFamily="50" charset="-127"/>
+                <a:cs typeface="Montserrat Bold"/>
+              </a:rPr>
+              <a:t>통신을</a:t>
+            </a:r>
+            <a:r>
+              <a:rPr lang="en-US" altLang="ko-KR" sz="4533" dirty="0" smtClean="0">
+                <a:solidFill>
+                  <a:srgbClr val="FAFAFA"/>
+                </a:solidFill>
+                <a:latin typeface="LG스마트체2.0 SemiBold" panose="020B0600000101010101" pitchFamily="50" charset="-127"/>
+                <a:ea typeface="LG스마트체2.0 SemiBold" panose="020B0600000101010101" pitchFamily="50" charset="-127"/>
+                <a:cs typeface="Montserrat Bold"/>
+              </a:rPr>
+              <a:t> </a:t>
+            </a:r>
+            <a:r>
+              <a:rPr lang="ko-KR" altLang="en-US" sz="4533" smtClean="0">
+                <a:solidFill>
+                  <a:srgbClr val="FAFAFA"/>
+                </a:solidFill>
+                <a:latin typeface="LG스마트체2.0 SemiBold" panose="020B0600000101010101" pitchFamily="50" charset="-127"/>
+                <a:ea typeface="LG스마트체2.0 SemiBold" panose="020B0600000101010101" pitchFamily="50" charset="-127"/>
+                <a:cs typeface="Montserrat Bold"/>
+              </a:rPr>
+              <a:t>활용한 </a:t>
+            </a:r>
+            <a:r>
+              <a:rPr lang="ko-KR" altLang="en-US" sz="4533" b="0" i="0" u="none" strike="noStrike" smtClean="0">
+                <a:solidFill>
+                  <a:srgbClr val="FAFAFA"/>
+                </a:solidFill>
+                <a:latin typeface="LG스마트체2.0 SemiBold" panose="020B0600000101010101" pitchFamily="50" charset="-127"/>
+                <a:ea typeface="LG스마트체2.0 SemiBold" panose="020B0600000101010101" pitchFamily="50" charset="-127"/>
+                <a:cs typeface="Montserrat Bold"/>
+              </a:rPr>
+              <a:t>쿵야 캐치 마인드 게임 구현</a:t>
+            </a:r>
+            <a:endParaRPr lang="en-US" sz="4533" b="0" i="0" u="none" strike="noStrike" dirty="0">
+              <a:solidFill>
+                <a:srgbClr val="FAFAFA"/>
+              </a:solidFill>
+              <a:latin typeface="LG스마트체2.0 SemiBold" panose="020B0600000101010101" pitchFamily="50" charset="-127"/>
+              <a:ea typeface="LG스마트체2.0 SemiBold" panose="020B0600000101010101" pitchFamily="50" charset="-127"/>
+              <a:cs typeface="Montserrat Bold"/>
+            </a:endParaRPr>
+          </a:p>
+        </p:txBody>
+      </p:sp>
+      <p:sp>
+        <p:nvSpPr>
+          <p:cNvPr id="30" name="TextBox 28"/>
+          <p:cNvSpPr txBox="1"/>
+          <p:nvPr/>
+        </p:nvSpPr>
+        <p:spPr>
+          <a:xfrm>
+            <a:off x="1181100" y="1993900"/>
+            <a:ext cx="8966200" cy="431800"/>
+          </a:xfrm>
+          <a:prstGeom prst="rect">
+            <a:avLst/>
+          </a:prstGeom>
+        </p:spPr>
+        <p:txBody>
+          <a:bodyPr lIns="0" tIns="30480" rIns="0" bIns="0" rtlCol="0" anchor="t"/>
+          <a:lstStyle/>
+          <a:p>
+            <a:pPr lvl="0" algn="r">
+              <a:lnSpc>
+                <a:spcPct val="99600"/>
+              </a:lnSpc>
+            </a:pPr>
+            <a:r>
+              <a:rPr lang="ko-KR" altLang="en-US" sz="2400" b="0" i="0" u="none" strike="noStrike" dirty="0" smtClean="0">
+                <a:solidFill>
+                  <a:srgbClr val="FAFAFA"/>
+                </a:solidFill>
+                <a:latin typeface="LG스마트체2.0 Regular" panose="020B0600000101010101" pitchFamily="50" charset="-127"/>
+                <a:ea typeface="LG스마트체2.0 Regular" panose="020B0600000101010101" pitchFamily="50" charset="-127"/>
+                <a:cs typeface="Work Sans Regular"/>
+              </a:rPr>
+              <a:t>소속</a:t>
+            </a:r>
+            <a:r>
+              <a:rPr lang="en-US" altLang="ko-KR" sz="2400" dirty="0">
+                <a:solidFill>
+                  <a:srgbClr val="FAFAFA"/>
+                </a:solidFill>
+                <a:latin typeface="LG스마트체2.0 Regular" panose="020B0600000101010101" pitchFamily="50" charset="-127"/>
+                <a:ea typeface="LG스마트체2.0 Regular" panose="020B0600000101010101" pitchFamily="50" charset="-127"/>
+                <a:cs typeface="Work Sans Regular"/>
+              </a:rPr>
+              <a:t>/</a:t>
+            </a:r>
+            <a:r>
+              <a:rPr lang="ko-KR" altLang="en-US" sz="2400" b="0" i="0" u="none" strike="noStrike" smtClean="0">
+                <a:solidFill>
+                  <a:srgbClr val="FAFAFA"/>
+                </a:solidFill>
+                <a:latin typeface="LG스마트체2.0 Regular" panose="020B0600000101010101" pitchFamily="50" charset="-127"/>
+                <a:ea typeface="LG스마트체2.0 Regular" panose="020B0600000101010101" pitchFamily="50" charset="-127"/>
+                <a:cs typeface="Work Sans Regular"/>
+              </a:rPr>
+              <a:t>성명 </a:t>
+            </a:r>
+            <a:r>
+              <a:rPr lang="en-US" altLang="ko-KR" sz="2400" b="0" i="0" u="none" strike="noStrike" dirty="0" smtClean="0">
+                <a:solidFill>
+                  <a:srgbClr val="FAFAFA"/>
+                </a:solidFill>
+                <a:latin typeface="LG스마트체2.0 Regular" panose="020B0600000101010101" pitchFamily="50" charset="-127"/>
+                <a:ea typeface="LG스마트체2.0 Regular" panose="020B0600000101010101" pitchFamily="50" charset="-127"/>
+                <a:cs typeface="Work Sans Regular"/>
+              </a:rPr>
+              <a:t>: </a:t>
+            </a:r>
+            <a:r>
+              <a:rPr lang="ko-KR" altLang="en-US" sz="2400" b="0" i="0" u="none" strike="noStrike" smtClean="0">
+                <a:solidFill>
+                  <a:srgbClr val="FAFAFA"/>
+                </a:solidFill>
+                <a:latin typeface="LG스마트체2.0 Regular" panose="020B0600000101010101" pitchFamily="50" charset="-127"/>
+                <a:ea typeface="LG스마트체2.0 Regular" panose="020B0600000101010101" pitchFamily="50" charset="-127"/>
+                <a:cs typeface="Work Sans Regular"/>
+              </a:rPr>
+              <a:t>엄제원</a:t>
+            </a:r>
+            <a:r>
+              <a:rPr lang="en-US" altLang="ko-KR" sz="2400" b="0" i="0" u="none" strike="noStrike" dirty="0" smtClean="0">
+                <a:solidFill>
+                  <a:srgbClr val="FAFAFA"/>
+                </a:solidFill>
+                <a:latin typeface="LG스마트체2.0 Regular" panose="020B0600000101010101" pitchFamily="50" charset="-127"/>
+                <a:ea typeface="LG스마트체2.0 Regular" panose="020B0600000101010101" pitchFamily="50" charset="-127"/>
+                <a:cs typeface="Work Sans Regular"/>
+              </a:rPr>
+              <a:t>, </a:t>
+            </a:r>
+            <a:r>
+              <a:rPr lang="ko-KR" altLang="en-US" sz="2400" b="0" i="0" u="none" strike="noStrike" smtClean="0">
+                <a:solidFill>
+                  <a:srgbClr val="FAFAFA"/>
+                </a:solidFill>
+                <a:latin typeface="LG스마트체2.0 Regular" panose="020B0600000101010101" pitchFamily="50" charset="-127"/>
+                <a:ea typeface="LG스마트체2.0 Regular" panose="020B0600000101010101" pitchFamily="50" charset="-127"/>
+                <a:cs typeface="Work Sans Regular"/>
+              </a:rPr>
+              <a:t>이경환</a:t>
+            </a:r>
+            <a:r>
+              <a:rPr lang="en-US" altLang="ko-KR" sz="2400" b="0" i="0" u="none" strike="noStrike" dirty="0" smtClean="0">
+                <a:solidFill>
+                  <a:srgbClr val="FAFAFA"/>
+                </a:solidFill>
+                <a:latin typeface="LG스마트체2.0 Regular" panose="020B0600000101010101" pitchFamily="50" charset="-127"/>
+                <a:ea typeface="LG스마트체2.0 Regular" panose="020B0600000101010101" pitchFamily="50" charset="-127"/>
+                <a:cs typeface="Work Sans Regular"/>
+              </a:rPr>
+              <a:t>, </a:t>
+            </a:r>
+            <a:r>
+              <a:rPr lang="ko-KR" altLang="en-US" sz="2400" b="0" i="0" u="none" strike="noStrike" smtClean="0">
+                <a:solidFill>
+                  <a:srgbClr val="FAFAFA"/>
+                </a:solidFill>
+                <a:latin typeface="LG스마트체2.0 Regular" panose="020B0600000101010101" pitchFamily="50" charset="-127"/>
+                <a:ea typeface="LG스마트체2.0 Regular" panose="020B0600000101010101" pitchFamily="50" charset="-127"/>
+                <a:cs typeface="Work Sans Regular"/>
+              </a:rPr>
+              <a:t>윤지원</a:t>
+            </a:r>
+            <a:r>
+              <a:rPr lang="en-US" altLang="ko-KR" sz="2400" b="0" i="0" u="none" strike="noStrike" dirty="0" smtClean="0">
+                <a:solidFill>
+                  <a:srgbClr val="FAFAFA"/>
+                </a:solidFill>
+                <a:latin typeface="LG스마트체2.0 Regular" panose="020B0600000101010101" pitchFamily="50" charset="-127"/>
+                <a:ea typeface="LG스마트체2.0 Regular" panose="020B0600000101010101" pitchFamily="50" charset="-127"/>
+                <a:cs typeface="Work Sans Regular"/>
+              </a:rPr>
+              <a:t> </a:t>
+            </a:r>
+            <a:endParaRPr lang="en-US" sz="2400" b="0" i="0" u="none" strike="noStrike" dirty="0">
+              <a:solidFill>
+                <a:srgbClr val="FAFAFA"/>
+              </a:solidFill>
+              <a:latin typeface="LG스마트체2.0 Regular" panose="020B0600000101010101" pitchFamily="50" charset="-127"/>
+              <a:ea typeface="LG스마트체2.0 Regular" panose="020B0600000101010101" pitchFamily="50" charset="-127"/>
+              <a:cs typeface="Work Sans Regular"/>
+            </a:endParaRPr>
+          </a:p>
+        </p:txBody>
+      </p:sp>
+      <p:sp>
+        <p:nvSpPr>
+          <p:cNvPr id="31" name="TextBox 17"/>
+          <p:cNvSpPr txBox="1"/>
+          <p:nvPr/>
+        </p:nvSpPr>
+        <p:spPr>
+          <a:xfrm>
+            <a:off x="3022600" y="15379700"/>
+            <a:ext cx="5283200" cy="330200"/>
+          </a:xfrm>
+          <a:prstGeom prst="rect">
+            <a:avLst/>
+          </a:prstGeom>
+        </p:spPr>
+        <p:txBody>
+          <a:bodyPr lIns="0" tIns="23707" rIns="0" bIns="0" rtlCol="0" anchor="t"/>
+          <a:lstStyle/>
+          <a:p>
+            <a:pPr lvl="0" algn="ctr">
+              <a:lnSpc>
+                <a:spcPct val="99600"/>
+              </a:lnSpc>
+            </a:pPr>
+            <a:r>
+              <a:rPr lang="en-US" sz="1866" b="1" dirty="0" smtClean="0">
+                <a:solidFill>
+                  <a:srgbClr val="FAFAFA"/>
+                </a:solidFill>
+                <a:latin typeface="LG스마트체2.0 Bold" panose="020B0600000101010101" pitchFamily="50" charset="-127"/>
+                <a:ea typeface="LG스마트체2.0 Bold" panose="020B0600000101010101" pitchFamily="50" charset="-127"/>
+                <a:cs typeface="Montserrat Bold"/>
+              </a:rPr>
+              <a:t>LG ELECTRONICS</a:t>
+            </a:r>
+            <a:endParaRPr lang="en-US" sz="1866" b="1" i="0" u="none" strike="noStrike" dirty="0">
+              <a:solidFill>
+                <a:srgbClr val="FAFAFA"/>
+              </a:solidFill>
+              <a:latin typeface="LG스마트체2.0 Bold" panose="020B0600000101010101" pitchFamily="50" charset="-127"/>
+              <a:ea typeface="LG스마트체2.0 Bold" panose="020B0600000101010101" pitchFamily="50" charset="-127"/>
+              <a:cs typeface="Montserrat Bold"/>
+            </a:endParaRPr>
+          </a:p>
+        </p:txBody>
+      </p:sp>
+      <p:pic>
+        <p:nvPicPr>
+          <p:cNvPr id="7" name="그림 6"/>
+          <p:cNvPicPr>
+            <a:picLocks noChangeAspect="1"/>
+          </p:cNvPicPr>
+          <p:nvPr/>
+        </p:nvPicPr>
+        <p:blipFill>
+          <a:blip r:embed="rId9">
+            <a:extLst>
+              <a:ext uri="{28A0092B-C50C-407E-A947-70E740481C1C}">
+                <a14:useLocalDpi xmlns:a14="http://schemas.microsoft.com/office/drawing/2010/main" val="0"/>
+              </a:ext>
+            </a:extLst>
+          </a:blip>
+          <a:stretch>
+            <a:fillRect/>
+          </a:stretch>
+        </p:blipFill>
+        <p:spPr>
+          <a:xfrm>
+            <a:off x="774700" y="4241800"/>
+            <a:ext cx="4320000" cy="2529501"/>
+          </a:xfrm>
+          <a:prstGeom prst="rect">
+            <a:avLst/>
+          </a:prstGeom>
+        </p:spPr>
+      </p:pic>
+      <p:pic>
+        <p:nvPicPr>
+          <p:cNvPr id="8" name="그림 7"/>
+          <p:cNvPicPr>
+            <a:picLocks noChangeAspect="1"/>
+          </p:cNvPicPr>
+          <p:nvPr/>
+        </p:nvPicPr>
+        <p:blipFill>
+          <a:blip r:embed="rId10">
+            <a:extLst>
+              <a:ext uri="{28A0092B-C50C-407E-A947-70E740481C1C}">
+                <a14:useLocalDpi xmlns:a14="http://schemas.microsoft.com/office/drawing/2010/main" val="0"/>
+              </a:ext>
+            </a:extLst>
+          </a:blip>
+          <a:stretch>
+            <a:fillRect/>
+          </a:stretch>
+        </p:blipFill>
+        <p:spPr>
+          <a:xfrm>
+            <a:off x="774700" y="6993029"/>
+            <a:ext cx="4320000" cy="2495245"/>
+          </a:xfrm>
+          <a:prstGeom prst="rect">
+            <a:avLst/>
+          </a:prstGeom>
+        </p:spPr>
+      </p:pic>
+      <p:pic>
+        <p:nvPicPr>
+          <p:cNvPr id="9" name="그림 8"/>
+          <p:cNvPicPr>
+            <a:picLocks noChangeAspect="1"/>
+          </p:cNvPicPr>
+          <p:nvPr/>
+        </p:nvPicPr>
+        <p:blipFill>
+          <a:blip r:embed="rId11">
+            <a:extLst>
+              <a:ext uri="{28A0092B-C50C-407E-A947-70E740481C1C}">
+                <a14:useLocalDpi xmlns:a14="http://schemas.microsoft.com/office/drawing/2010/main" val="0"/>
+              </a:ext>
+            </a:extLst>
+          </a:blip>
+          <a:stretch>
+            <a:fillRect/>
+          </a:stretch>
+        </p:blipFill>
+        <p:spPr>
+          <a:xfrm>
+            <a:off x="5732780" y="6968441"/>
+            <a:ext cx="4320000" cy="2517895"/>
+          </a:xfrm>
+          <a:prstGeom prst="rect">
+            <a:avLst/>
+          </a:prstGeom>
+        </p:spPr>
+      </p:pic>
+      <p:pic>
+        <p:nvPicPr>
+          <p:cNvPr id="10" name="그림 9"/>
+          <p:cNvPicPr>
+            <a:picLocks noChangeAspect="1"/>
+          </p:cNvPicPr>
+          <p:nvPr/>
+        </p:nvPicPr>
+        <p:blipFill>
+          <a:blip r:embed="rId12">
+            <a:extLst>
+              <a:ext uri="{28A0092B-C50C-407E-A947-70E740481C1C}">
+                <a14:useLocalDpi xmlns:a14="http://schemas.microsoft.com/office/drawing/2010/main" val="0"/>
+              </a:ext>
+            </a:extLst>
+          </a:blip>
+          <a:stretch>
+            <a:fillRect/>
+          </a:stretch>
+        </p:blipFill>
+        <p:spPr>
+          <a:xfrm>
+            <a:off x="5732780" y="4241800"/>
+            <a:ext cx="4320000" cy="2511237"/>
+          </a:xfrm>
+          <a:prstGeom prst="rect">
+            <a:avLst/>
+          </a:prstGeom>
+        </p:spPr>
+      </p:pic>
+      <p:pic>
+        <p:nvPicPr>
+          <p:cNvPr id="12" name="그림 11"/>
+          <p:cNvPicPr>
+            <a:picLocks noChangeAspect="1"/>
+          </p:cNvPicPr>
+          <p:nvPr/>
+        </p:nvPicPr>
+        <p:blipFill>
+          <a:blip r:embed="rId13">
+            <a:extLst>
+              <a:ext uri="{28A0092B-C50C-407E-A947-70E740481C1C}">
+                <a14:useLocalDpi xmlns:a14="http://schemas.microsoft.com/office/drawing/2010/main" val="0"/>
+              </a:ext>
+            </a:extLst>
+          </a:blip>
+          <a:stretch>
+            <a:fillRect/>
+          </a:stretch>
+        </p:blipFill>
+        <p:spPr>
+          <a:xfrm>
+            <a:off x="774700" y="12492592"/>
+            <a:ext cx="4320000" cy="2548125"/>
+          </a:xfrm>
+          <a:prstGeom prst="rect">
+            <a:avLst/>
+          </a:prstGeom>
+        </p:spPr>
+      </p:pic>
+      <p:pic>
+        <p:nvPicPr>
+          <p:cNvPr id="13" name="그림 12"/>
+          <p:cNvPicPr>
+            <a:picLocks noChangeAspect="1"/>
+          </p:cNvPicPr>
+          <p:nvPr/>
+        </p:nvPicPr>
+        <p:blipFill>
+          <a:blip r:embed="rId14" cstate="print">
+            <a:extLst>
+              <a:ext uri="{28A0092B-C50C-407E-A947-70E740481C1C}">
+                <a14:useLocalDpi xmlns:a14="http://schemas.microsoft.com/office/drawing/2010/main" val="0"/>
+              </a:ext>
+            </a:extLst>
+          </a:blip>
+          <a:stretch>
+            <a:fillRect/>
+          </a:stretch>
+        </p:blipFill>
+        <p:spPr>
+          <a:xfrm>
+            <a:off x="774700" y="9735876"/>
+            <a:ext cx="4320000" cy="2477346"/>
+          </a:xfrm>
+          <a:prstGeom prst="rect">
+            <a:avLst/>
+          </a:prstGeom>
+        </p:spPr>
+      </p:pic>
+      <p:pic>
+        <p:nvPicPr>
+          <p:cNvPr id="15" name="그림 14"/>
+          <p:cNvPicPr>
+            <a:picLocks noChangeAspect="1"/>
+          </p:cNvPicPr>
+          <p:nvPr/>
+        </p:nvPicPr>
+        <p:blipFill>
+          <a:blip r:embed="rId15">
+            <a:extLst>
+              <a:ext uri="{28A0092B-C50C-407E-A947-70E740481C1C}">
+                <a14:useLocalDpi xmlns:a14="http://schemas.microsoft.com/office/drawing/2010/main" val="0"/>
+              </a:ext>
+            </a:extLst>
+          </a:blip>
+          <a:stretch>
+            <a:fillRect/>
+          </a:stretch>
+        </p:blipFill>
+        <p:spPr>
+          <a:xfrm>
+            <a:off x="5732780" y="12430973"/>
+            <a:ext cx="4320000" cy="2587563"/>
+          </a:xfrm>
+          <a:prstGeom prst="rect">
+            <a:avLst/>
+          </a:prstGeom>
+        </p:spPr>
+      </p:pic>
+      <p:pic>
+        <p:nvPicPr>
+          <p:cNvPr id="16" name="그림 15"/>
+          <p:cNvPicPr>
+            <a:picLocks noChangeAspect="1"/>
+          </p:cNvPicPr>
+          <p:nvPr/>
+        </p:nvPicPr>
+        <p:blipFill>
+          <a:blip r:embed="rId16" cstate="print">
+            <a:extLst>
+              <a:ext uri="{28A0092B-C50C-407E-A947-70E740481C1C}">
+                <a14:useLocalDpi xmlns:a14="http://schemas.microsoft.com/office/drawing/2010/main" val="0"/>
+              </a:ext>
+            </a:extLst>
+          </a:blip>
+          <a:stretch>
+            <a:fillRect/>
+          </a:stretch>
+        </p:blipFill>
+        <p:spPr>
+          <a:xfrm>
+            <a:off x="5732780" y="9701740"/>
+            <a:ext cx="4320000" cy="2513828"/>
+          </a:xfrm>
+          <a:prstGeom prst="rect">
+            <a:avLst/>
+          </a:prstGeom>
+        </p:spPr>
+      </p:pic>
+    </p:spTree>
+    <p:extLst>
+      <p:ext uri="{BB962C8B-B14F-4D97-AF65-F5344CB8AC3E}">
+        <p14:creationId xmlns:p14="http://schemas.microsoft.com/office/powerpoint/2010/main" val="2858289469"/>
+      </p:ext>
+    </p:extLst>
+  </p:cSld>
+  <p:clrMapOvr>
+    <a:masterClrMapping/>
+  </p:clrMapOvr>
+</p:sld>
+</file>
+
+<file path=ppt/slides/slide4.xml><?xml version="1.0" encoding="utf-8"?>
+<p:sld xmlns:a="http://schemas.openxmlformats.org/drawingml/2006/main" xmlns:r="http://schemas.openxmlformats.org/officeDocument/2006/relationships" xmlns:p="http://schemas.openxmlformats.org/presentationml/2006/main">
+  <p:cSld>
+    <p:spTree>
+      <p:nvGrpSpPr>
+        <p:cNvPr id="1" name=""/>
+        <p:cNvGrpSpPr/>
+        <p:nvPr/>
+      </p:nvGrpSpPr>
+      <p:grpSpPr>
+        <a:xfrm>
+          <a:off x="0" y="0"/>
+          <a:ext cx="0" cy="0"/>
+          <a:chOff x="0" y="0"/>
+          <a:chExt cx="0" cy="0"/>
+        </a:xfrm>
+      </p:grpSpPr>
+      <p:pic>
+        <p:nvPicPr>
+          <p:cNvPr id="2" name="Picture 2"/>
+          <p:cNvPicPr>
+            <a:picLocks noChangeAspect="1"/>
+          </p:cNvPicPr>
+          <p:nvPr/>
+        </p:nvPicPr>
+        <p:blipFill>
+          <a:blip r:embed="rId2"/>
+          <a:stretch>
+            <a:fillRect/>
+          </a:stretch>
+        </p:blipFill>
+        <p:spPr>
+          <a:xfrm>
+            <a:off x="0" y="0"/>
+            <a:ext cx="11315700" cy="16002000"/>
+          </a:xfrm>
+          <a:prstGeom prst="rect">
+            <a:avLst/>
+          </a:prstGeom>
+        </p:spPr>
+      </p:pic>
+      <p:pic>
+        <p:nvPicPr>
+          <p:cNvPr id="3" name="Picture 3"/>
+          <p:cNvPicPr>
+            <a:picLocks noChangeAspect="1"/>
+          </p:cNvPicPr>
+          <p:nvPr/>
+        </p:nvPicPr>
+        <p:blipFill>
+          <a:blip r:embed="rId3"/>
+          <a:stretch>
+            <a:fillRect/>
+          </a:stretch>
+        </p:blipFill>
+        <p:spPr>
+          <a:xfrm>
+            <a:off x="0" y="15036800"/>
+            <a:ext cx="11315700" cy="977900"/>
+          </a:xfrm>
+          <a:prstGeom prst="rect">
+            <a:avLst/>
+          </a:prstGeom>
+        </p:spPr>
+      </p:pic>
+      <p:pic>
+        <p:nvPicPr>
+          <p:cNvPr id="4" name="Picture 4"/>
+          <p:cNvPicPr>
+            <a:picLocks noChangeAspect="1"/>
+          </p:cNvPicPr>
+          <p:nvPr/>
+        </p:nvPicPr>
+        <p:blipFill>
+          <a:blip r:embed="rId4"/>
+          <a:stretch>
+            <a:fillRect/>
+          </a:stretch>
+        </p:blipFill>
+        <p:spPr>
+          <a:xfrm>
+            <a:off x="0" y="-25400"/>
+            <a:ext cx="11315700" cy="2755900"/>
+          </a:xfrm>
+          <a:prstGeom prst="rect">
+            <a:avLst/>
+          </a:prstGeom>
+        </p:spPr>
+      </p:pic>
+      <p:pic>
+        <p:nvPicPr>
+          <p:cNvPr id="5" name="Picture 5"/>
+          <p:cNvPicPr>
+            <a:picLocks noChangeAspect="1"/>
+          </p:cNvPicPr>
+          <p:nvPr/>
+        </p:nvPicPr>
+        <p:blipFill>
+          <a:blip r:embed="rId5"/>
+          <a:stretch>
+            <a:fillRect/>
+          </a:stretch>
+        </p:blipFill>
+        <p:spPr>
+          <a:xfrm rot="10800000">
+            <a:off x="7023100" y="0"/>
+            <a:ext cx="4292600" cy="2730500"/>
+          </a:xfrm>
+          <a:prstGeom prst="rect">
+            <a:avLst/>
+          </a:prstGeom>
+        </p:spPr>
+      </p:pic>
+      <p:pic>
+        <p:nvPicPr>
+          <p:cNvPr id="6" name="Picture 6"/>
+          <p:cNvPicPr>
+            <a:picLocks noChangeAspect="1"/>
+          </p:cNvPicPr>
+          <p:nvPr/>
+        </p:nvPicPr>
+        <p:blipFill>
+          <a:blip r:embed="rId6"/>
+          <a:stretch>
+            <a:fillRect/>
+          </a:stretch>
+        </p:blipFill>
+        <p:spPr>
+          <a:xfrm rot="10800000">
+            <a:off x="0" y="-12700"/>
+            <a:ext cx="3962400" cy="2730500"/>
+          </a:xfrm>
+          <a:prstGeom prst="rect">
+            <a:avLst/>
+          </a:prstGeom>
+        </p:spPr>
+      </p:pic>
+      <p:pic>
+        <p:nvPicPr>
+          <p:cNvPr id="7" name="Picture 7"/>
+          <p:cNvPicPr>
+            <a:picLocks noChangeAspect="1"/>
+          </p:cNvPicPr>
+          <p:nvPr/>
+        </p:nvPicPr>
+        <p:blipFill>
+          <a:blip r:embed="rId7"/>
+          <a:stretch>
+            <a:fillRect/>
+          </a:stretch>
+        </p:blipFill>
+        <p:spPr>
+          <a:xfrm>
+            <a:off x="5270500" y="3251200"/>
+            <a:ext cx="6223000" cy="2971800"/>
+          </a:xfrm>
+          <a:prstGeom prst="rect">
+            <a:avLst/>
+          </a:prstGeom>
+        </p:spPr>
+      </p:pic>
+      <p:pic>
+        <p:nvPicPr>
+          <p:cNvPr id="8" name="Picture 8"/>
+          <p:cNvPicPr>
+            <a:picLocks noChangeAspect="1"/>
+          </p:cNvPicPr>
+          <p:nvPr/>
+        </p:nvPicPr>
+        <p:blipFill>
+          <a:blip r:embed="rId8"/>
+          <a:stretch>
+            <a:fillRect/>
+          </a:stretch>
+        </p:blipFill>
+        <p:spPr>
+          <a:xfrm>
+            <a:off x="5270500" y="3251200"/>
+            <a:ext cx="3098800" cy="3098800"/>
+          </a:xfrm>
+          <a:prstGeom prst="rect">
+            <a:avLst/>
+          </a:prstGeom>
+        </p:spPr>
+      </p:pic>
+      <p:pic>
+        <p:nvPicPr>
+          <p:cNvPr id="9" name="Picture 9"/>
+          <p:cNvPicPr>
+            <a:picLocks noChangeAspect="1"/>
+          </p:cNvPicPr>
+          <p:nvPr/>
+        </p:nvPicPr>
+        <p:blipFill>
+          <a:blip r:embed="rId9"/>
+          <a:stretch>
+            <a:fillRect/>
+          </a:stretch>
+        </p:blipFill>
+        <p:spPr>
+          <a:xfrm>
+            <a:off x="5499100" y="9931400"/>
+            <a:ext cx="5143500" cy="4826000"/>
+          </a:xfrm>
+          <a:prstGeom prst="rect">
+            <a:avLst/>
+          </a:prstGeom>
+        </p:spPr>
+      </p:pic>
+      <p:pic>
+        <p:nvPicPr>
+          <p:cNvPr id="10" name="Picture 10"/>
+          <p:cNvPicPr>
+            <a:picLocks noChangeAspect="1"/>
+          </p:cNvPicPr>
+          <p:nvPr/>
+        </p:nvPicPr>
+        <p:blipFill>
+          <a:blip r:embed="rId10"/>
+          <a:stretch>
+            <a:fillRect/>
+          </a:stretch>
+        </p:blipFill>
+        <p:spPr>
+          <a:xfrm>
+            <a:off x="406400" y="6311900"/>
+            <a:ext cx="4419600" cy="3365500"/>
+          </a:xfrm>
+          <a:prstGeom prst="rect">
+            <a:avLst/>
+          </a:prstGeom>
+        </p:spPr>
+      </p:pic>
+      <p:pic>
+        <p:nvPicPr>
+          <p:cNvPr id="11" name="Picture 11"/>
+          <p:cNvPicPr>
+            <a:picLocks noChangeAspect="1"/>
+          </p:cNvPicPr>
+          <p:nvPr/>
+        </p:nvPicPr>
+        <p:blipFill>
+          <a:blip r:embed="rId11"/>
+          <a:stretch>
+            <a:fillRect/>
+          </a:stretch>
+        </p:blipFill>
+        <p:spPr>
+          <a:xfrm>
+            <a:off x="774700" y="3225800"/>
+            <a:ext cx="4089400" cy="736600"/>
+          </a:xfrm>
+          <a:prstGeom prst="rect">
+            <a:avLst/>
+          </a:prstGeom>
+        </p:spPr>
+      </p:pic>
+      <p:pic>
+        <p:nvPicPr>
+          <p:cNvPr id="12" name="Picture 12"/>
+          <p:cNvPicPr>
+            <a:picLocks noChangeAspect="1"/>
+          </p:cNvPicPr>
+          <p:nvPr/>
+        </p:nvPicPr>
+        <p:blipFill>
+          <a:blip r:embed="rId12"/>
+          <a:stretch>
+            <a:fillRect/>
+          </a:stretch>
+        </p:blipFill>
+        <p:spPr>
+          <a:xfrm>
+            <a:off x="5892800" y="6667500"/>
+            <a:ext cx="4673600" cy="736600"/>
+          </a:xfrm>
+          <a:prstGeom prst="rect">
+            <a:avLst/>
+          </a:prstGeom>
+        </p:spPr>
+      </p:pic>
+      <p:pic>
+        <p:nvPicPr>
+          <p:cNvPr id="13" name="Picture 13"/>
+          <p:cNvPicPr>
+            <a:picLocks noChangeAspect="1"/>
+          </p:cNvPicPr>
+          <p:nvPr/>
+        </p:nvPicPr>
+        <p:blipFill>
+          <a:blip r:embed="rId13"/>
+          <a:stretch>
+            <a:fillRect/>
+          </a:stretch>
+        </p:blipFill>
+        <p:spPr>
+          <a:xfrm>
+            <a:off x="774700" y="10414000"/>
+            <a:ext cx="4089400" cy="736600"/>
+          </a:xfrm>
+          <a:prstGeom prst="rect">
+            <a:avLst/>
+          </a:prstGeom>
+        </p:spPr>
+      </p:pic>
+      <p:pic>
+        <p:nvPicPr>
+          <p:cNvPr id="14" name="Picture 14"/>
+          <p:cNvPicPr>
+            <a:picLocks noChangeAspect="1"/>
+          </p:cNvPicPr>
+          <p:nvPr/>
+        </p:nvPicPr>
+        <p:blipFill>
+          <a:blip r:embed="rId14"/>
+          <a:stretch>
+            <a:fillRect/>
+          </a:stretch>
+        </p:blipFill>
+        <p:spPr>
+          <a:xfrm>
+            <a:off x="330200" y="3098800"/>
+            <a:ext cx="1003300" cy="1003300"/>
+          </a:xfrm>
+          <a:prstGeom prst="rect">
+            <a:avLst/>
+          </a:prstGeom>
+        </p:spPr>
+      </p:pic>
+      <p:pic>
+        <p:nvPicPr>
+          <p:cNvPr id="15" name="Picture 15"/>
+          <p:cNvPicPr>
+            <a:picLocks noChangeAspect="1"/>
           </p:cNvPicPr>
           <p:nvPr/>
         </p:nvPicPr>
@@ -3403,7 +5985,7 @@
           </a:stretch>
         </p:blipFill>
         <p:spPr>
-          <a:xfrm rot="0">
+          <a:xfrm>
             <a:off x="5461000" y="6540500"/>
             <a:ext cx="1003300" cy="1003300"/>
           </a:xfrm>
@@ -3414,9 +5996,9 @@
       </p:pic>
       <p:pic>
         <p:nvPicPr>
-          <p:cNvPr name="Picture 16" id="16"/>
+          <p:cNvPr id="16" name="Picture 16"/>
           <p:cNvPicPr>
-            <a:picLocks noChangeAspect="true"/>
+            <a:picLocks noChangeAspect="1"/>
           </p:cNvPicPr>
           <p:nvPr/>
         </p:nvPicPr>
@@ -3427,7 +6009,7 @@
           </a:stretch>
         </p:blipFill>
         <p:spPr>
-          <a:xfrm rot="0">
+          <a:xfrm>
             <a:off x="330200" y="10274300"/>
             <a:ext cx="1003300" cy="1003300"/>
           </a:xfrm>
@@ -3438,12 +6020,12 @@
       </p:pic>
       <p:sp>
         <p:nvSpPr>
-          <p:cNvPr name="TextBox 17" id="17"/>
-          <p:cNvSpPr txBox="true"/>
-          <p:nvPr/>
-        </p:nvSpPr>
-        <p:spPr>
-          <a:xfrm rot="0">
+          <p:cNvPr id="17" name="TextBox 17"/>
+          <p:cNvSpPr txBox="1"/>
+          <p:nvPr/>
+        </p:nvSpPr>
+        <p:spPr>
+          <a:xfrm>
             <a:off x="3022600" y="15379700"/>
             <a:ext cx="5283200" cy="330200"/>
           </a:xfrm>
@@ -3452,16 +6034,16 @@
           </a:prstGeom>
         </p:spPr>
         <p:txBody>
-          <a:bodyPr anchor="t" rtlCol="false" lIns="0" tIns="23707" rIns="0" bIns="0"/>
-          <a:lstStyle/>
-          <a:p>
-            <a:pPr algn="ctr" lvl="0">
+          <a:bodyPr lIns="0" tIns="23707" rIns="0" bIns="0" rtlCol="0" anchor="t"/>
+          <a:lstStyle/>
+          <a:p>
+            <a:pPr lvl="0" algn="ctr">
               <a:lnSpc>
                 <a:spcPct val="99600"/>
               </a:lnSpc>
             </a:pPr>
             <a:r>
-              <a:rPr lang="en-US" sz="1866" b="false" i="false" u="none" strike="noStrike">
+              <a:rPr lang="en-US" sz="1866" b="0" i="0" u="none" strike="noStrike">
                 <a:solidFill>
                   <a:srgbClr val="FAFAFA"/>
                 </a:solidFill>
@@ -3476,12 +6058,12 @@
       </p:sp>
       <p:sp>
         <p:nvSpPr>
-          <p:cNvPr name="TextBox 18" id="18"/>
-          <p:cNvSpPr txBox="true"/>
-          <p:nvPr/>
-        </p:nvSpPr>
-        <p:spPr>
-          <a:xfrm rot="0">
+          <p:cNvPr id="18" name="TextBox 18"/>
+          <p:cNvSpPr txBox="1"/>
+          <p:nvPr/>
+        </p:nvSpPr>
+        <p:spPr>
+          <a:xfrm>
             <a:off x="469900" y="4305300"/>
             <a:ext cx="4495800" cy="1892300"/>
           </a:xfrm>
@@ -3490,16 +6072,16 @@
           </a:prstGeom>
         </p:spPr>
         <p:txBody>
-          <a:bodyPr anchor="t" rtlCol="false" lIns="0" tIns="30480" rIns="0" bIns="0"/>
-          <a:lstStyle/>
-          <a:p>
-            <a:pPr algn="l" lvl="0">
+          <a:bodyPr lIns="0" tIns="30480" rIns="0" bIns="0" rtlCol="0" anchor="t"/>
+          <a:lstStyle/>
+          <a:p>
+            <a:pPr lvl="0" algn="l">
               <a:lnSpc>
                 <a:spcPct val="99600"/>
               </a:lnSpc>
             </a:pPr>
             <a:r>
-              <a:rPr lang="en-US" sz="2400" b="false" i="false" u="none" strike="noStrike">
+              <a:rPr lang="en-US" sz="2400" b="0" i="0" u="none" strike="noStrike">
                 <a:solidFill>
                   <a:srgbClr val="333333"/>
                 </a:solidFill>
@@ -3514,12 +6096,12 @@
       </p:sp>
       <p:sp>
         <p:nvSpPr>
-          <p:cNvPr name="TextBox 19" id="19"/>
-          <p:cNvSpPr txBox="true"/>
-          <p:nvPr/>
-        </p:nvSpPr>
-        <p:spPr>
-          <a:xfrm rot="0">
+          <p:cNvPr id="19" name="TextBox 19"/>
+          <p:cNvSpPr txBox="1"/>
+          <p:nvPr/>
+        </p:nvSpPr>
+        <p:spPr>
+          <a:xfrm>
             <a:off x="5600700" y="7721600"/>
             <a:ext cx="5092700" cy="1892300"/>
           </a:xfrm>
@@ -3528,16 +6110,16 @@
           </a:prstGeom>
         </p:spPr>
         <p:txBody>
-          <a:bodyPr anchor="t" rtlCol="false" lIns="0" tIns="30480" rIns="0" bIns="0"/>
-          <a:lstStyle/>
-          <a:p>
-            <a:pPr algn="l" lvl="0">
+          <a:bodyPr lIns="0" tIns="30480" rIns="0" bIns="0" rtlCol="0" anchor="t"/>
+          <a:lstStyle/>
+          <a:p>
+            <a:pPr lvl="0" algn="l">
               <a:lnSpc>
                 <a:spcPct val="99600"/>
               </a:lnSpc>
             </a:pPr>
             <a:r>
-              <a:rPr lang="en-US" sz="2400" b="false" i="false" u="none" strike="noStrike">
+              <a:rPr lang="en-US" sz="2400" b="0" i="0" u="none" strike="noStrike">
                 <a:solidFill>
                   <a:srgbClr val="333333"/>
                 </a:solidFill>
@@ -3552,12 +6134,12 @@
       </p:sp>
       <p:sp>
         <p:nvSpPr>
-          <p:cNvPr name="TextBox 20" id="20"/>
-          <p:cNvSpPr txBox="true"/>
-          <p:nvPr/>
-        </p:nvSpPr>
-        <p:spPr>
-          <a:xfrm rot="0">
+          <p:cNvPr id="20" name="TextBox 20"/>
+          <p:cNvSpPr txBox="1"/>
+          <p:nvPr/>
+        </p:nvSpPr>
+        <p:spPr>
+          <a:xfrm>
             <a:off x="444500" y="11468100"/>
             <a:ext cx="4546600" cy="3149600"/>
           </a:xfrm>
@@ -3566,16 +6148,16 @@
           </a:prstGeom>
         </p:spPr>
         <p:txBody>
-          <a:bodyPr anchor="t" rtlCol="false" lIns="0" tIns="32173" rIns="0" bIns="0"/>
-          <a:lstStyle/>
-          <a:p>
-            <a:pPr algn="l" lvl="0">
+          <a:bodyPr lIns="0" tIns="32173" rIns="0" bIns="0" rtlCol="0" anchor="t"/>
+          <a:lstStyle/>
+          <a:p>
+            <a:pPr lvl="0" algn="l">
               <a:lnSpc>
                 <a:spcPct val="99600"/>
               </a:lnSpc>
             </a:pPr>
             <a:r>
-              <a:rPr lang="en-US" sz="2533" b="false" i="false" u="none" strike="noStrike">
+              <a:rPr lang="en-US" sz="2533" b="0" i="0" u="none" strike="noStrike">
                 <a:solidFill>
                   <a:srgbClr val="333333"/>
                 </a:solidFill>
@@ -3590,12 +6172,12 @@
       </p:sp>
       <p:sp>
         <p:nvSpPr>
-          <p:cNvPr name="TextBox 21" id="21"/>
-          <p:cNvSpPr txBox="true"/>
-          <p:nvPr/>
-        </p:nvSpPr>
-        <p:spPr>
-          <a:xfrm rot="0">
+          <p:cNvPr id="21" name="TextBox 21"/>
+          <p:cNvSpPr txBox="1"/>
+          <p:nvPr/>
+        </p:nvSpPr>
+        <p:spPr>
+          <a:xfrm>
             <a:off x="1270000" y="10502900"/>
             <a:ext cx="3644900" cy="571500"/>
           </a:xfrm>
@@ -3604,16 +6186,16 @@
           </a:prstGeom>
         </p:spPr>
         <p:txBody>
-          <a:bodyPr anchor="t" rtlCol="false" lIns="0" tIns="40640" rIns="0" bIns="0"/>
-          <a:lstStyle/>
-          <a:p>
-            <a:pPr algn="ctr" lvl="0">
+          <a:bodyPr lIns="0" tIns="40640" rIns="0" bIns="0" rtlCol="0" anchor="t"/>
+          <a:lstStyle/>
+          <a:p>
+            <a:pPr lvl="0" algn="ctr">
               <a:lnSpc>
                 <a:spcPct val="99600"/>
               </a:lnSpc>
             </a:pPr>
             <a:r>
-              <a:rPr lang="en-US" sz="3200" b="false" i="false" u="none" strike="noStrike">
+              <a:rPr lang="en-US" sz="3200" b="0" i="0" u="none" strike="noStrike">
                 <a:solidFill>
                   <a:srgbClr val="FAFAFA"/>
                 </a:solidFill>
@@ -3628,12 +6210,12 @@
       </p:sp>
       <p:sp>
         <p:nvSpPr>
-          <p:cNvPr name="TextBox 22" id="22"/>
-          <p:cNvSpPr txBox="true"/>
-          <p:nvPr/>
-        </p:nvSpPr>
-        <p:spPr>
-          <a:xfrm rot="0">
+          <p:cNvPr id="22" name="TextBox 22"/>
+          <p:cNvSpPr txBox="1"/>
+          <p:nvPr/>
+        </p:nvSpPr>
+        <p:spPr>
+          <a:xfrm>
             <a:off x="6400800" y="6781800"/>
             <a:ext cx="4025900" cy="571500"/>
           </a:xfrm>
@@ -3642,16 +6224,16 @@
           </a:prstGeom>
         </p:spPr>
         <p:txBody>
-          <a:bodyPr anchor="t" rtlCol="false" lIns="0" tIns="40640" rIns="0" bIns="0"/>
-          <a:lstStyle/>
-          <a:p>
-            <a:pPr algn="ctr" lvl="0">
+          <a:bodyPr lIns="0" tIns="40640" rIns="0" bIns="0" rtlCol="0" anchor="t"/>
+          <a:lstStyle/>
+          <a:p>
+            <a:pPr lvl="0" algn="ctr">
               <a:lnSpc>
                 <a:spcPct val="99600"/>
               </a:lnSpc>
             </a:pPr>
             <a:r>
-              <a:rPr lang="en-US" sz="3200" b="false" i="false" u="none" strike="noStrike">
+              <a:rPr lang="en-US" sz="3200" b="0" i="0" u="none" strike="noStrike">
                 <a:solidFill>
                   <a:srgbClr val="FAFAFA"/>
                 </a:solidFill>
@@ -3666,12 +6248,12 @@
       </p:sp>
       <p:sp>
         <p:nvSpPr>
-          <p:cNvPr name="TextBox 23" id="23"/>
-          <p:cNvSpPr txBox="true"/>
-          <p:nvPr/>
-        </p:nvSpPr>
-        <p:spPr>
-          <a:xfrm rot="0">
+          <p:cNvPr id="23" name="TextBox 23"/>
+          <p:cNvSpPr txBox="1"/>
+          <p:nvPr/>
+        </p:nvSpPr>
+        <p:spPr>
+          <a:xfrm>
             <a:off x="1270000" y="3327400"/>
             <a:ext cx="3644900" cy="571500"/>
           </a:xfrm>
@@ -3680,16 +6262,16 @@
           </a:prstGeom>
         </p:spPr>
         <p:txBody>
-          <a:bodyPr anchor="t" rtlCol="false" lIns="0" tIns="40640" rIns="0" bIns="0"/>
-          <a:lstStyle/>
-          <a:p>
-            <a:pPr algn="ctr" lvl="0">
+          <a:bodyPr lIns="0" tIns="40640" rIns="0" bIns="0" rtlCol="0" anchor="t"/>
+          <a:lstStyle/>
+          <a:p>
+            <a:pPr lvl="0" algn="ctr">
               <a:lnSpc>
                 <a:spcPct val="99600"/>
               </a:lnSpc>
             </a:pPr>
             <a:r>
-              <a:rPr lang="en-US" sz="3200" b="false" i="false" u="none" strike="noStrike">
+              <a:rPr lang="en-US" sz="3200" b="0" i="0" u="none" strike="noStrike">
                 <a:solidFill>
                   <a:srgbClr val="FAFAFA"/>
                 </a:solidFill>
@@ -3704,12 +6286,12 @@
       </p:sp>
       <p:sp>
         <p:nvSpPr>
-          <p:cNvPr name="TextBox 24" id="24"/>
-          <p:cNvSpPr txBox="true"/>
-          <p:nvPr/>
-        </p:nvSpPr>
-        <p:spPr>
-          <a:xfrm rot="0">
+          <p:cNvPr id="24" name="TextBox 24"/>
+          <p:cNvSpPr txBox="1"/>
+          <p:nvPr/>
+        </p:nvSpPr>
+        <p:spPr>
+          <a:xfrm>
             <a:off x="5626100" y="6769100"/>
             <a:ext cx="673100" cy="571500"/>
           </a:xfrm>
@@ -3718,16 +6300,16 @@
           </a:prstGeom>
         </p:spPr>
         <p:txBody>
-          <a:bodyPr anchor="t" rtlCol="false" lIns="0" tIns="40640" rIns="0" bIns="0"/>
-          <a:lstStyle/>
-          <a:p>
-            <a:pPr algn="ctr" lvl="0">
+          <a:bodyPr lIns="0" tIns="40640" rIns="0" bIns="0" rtlCol="0" anchor="t"/>
+          <a:lstStyle/>
+          <a:p>
+            <a:pPr lvl="0" algn="ctr">
               <a:lnSpc>
                 <a:spcPct val="99600"/>
               </a:lnSpc>
             </a:pPr>
             <a:r>
-              <a:rPr lang="en-US" sz="3200" b="false" i="false" u="none" strike="noStrike">
+              <a:rPr lang="en-US" sz="3200" b="0" i="0" u="none" strike="noStrike">
                 <a:solidFill>
                   <a:srgbClr val="FAFAFA"/>
                 </a:solidFill>
@@ -3742,12 +6324,12 @@
       </p:sp>
       <p:sp>
         <p:nvSpPr>
-          <p:cNvPr name="TextBox 25" id="25"/>
-          <p:cNvSpPr txBox="true"/>
-          <p:nvPr/>
-        </p:nvSpPr>
-        <p:spPr>
-          <a:xfrm rot="0">
+          <p:cNvPr id="25" name="TextBox 25"/>
+          <p:cNvSpPr txBox="1"/>
+          <p:nvPr/>
+        </p:nvSpPr>
+        <p:spPr>
+          <a:xfrm>
             <a:off x="495300" y="10502900"/>
             <a:ext cx="673100" cy="571500"/>
           </a:xfrm>
@@ -3756,16 +6338,16 @@
           </a:prstGeom>
         </p:spPr>
         <p:txBody>
-          <a:bodyPr anchor="t" rtlCol="false" lIns="0" tIns="40640" rIns="0" bIns="0"/>
-          <a:lstStyle/>
-          <a:p>
-            <a:pPr algn="ctr" lvl="0">
+          <a:bodyPr lIns="0" tIns="40640" rIns="0" bIns="0" rtlCol="0" anchor="t"/>
+          <a:lstStyle/>
+          <a:p>
+            <a:pPr lvl="0" algn="ctr">
               <a:lnSpc>
                 <a:spcPct val="99600"/>
               </a:lnSpc>
             </a:pPr>
             <a:r>
-              <a:rPr lang="en-US" sz="3200" b="false" i="false" u="none" strike="noStrike">
+              <a:rPr lang="en-US" sz="3200" b="0" i="0" u="none" strike="noStrike">
                 <a:solidFill>
                   <a:srgbClr val="FAFAFA"/>
                 </a:solidFill>
@@ -3780,12 +6362,12 @@
       </p:sp>
       <p:sp>
         <p:nvSpPr>
-          <p:cNvPr name="TextBox 26" id="26"/>
-          <p:cNvSpPr txBox="true"/>
-          <p:nvPr/>
-        </p:nvSpPr>
-        <p:spPr>
-          <a:xfrm rot="0">
+          <p:cNvPr id="26" name="TextBox 26"/>
+          <p:cNvSpPr txBox="1"/>
+          <p:nvPr/>
+        </p:nvSpPr>
+        <p:spPr>
+          <a:xfrm>
             <a:off x="546100" y="3327400"/>
             <a:ext cx="584200" cy="571500"/>
           </a:xfrm>
@@ -3794,16 +6376,16 @@
           </a:prstGeom>
         </p:spPr>
         <p:txBody>
-          <a:bodyPr anchor="t" rtlCol="false" lIns="0" tIns="40640" rIns="0" bIns="0"/>
-          <a:lstStyle/>
-          <a:p>
-            <a:pPr algn="ctr" lvl="0">
+          <a:bodyPr lIns="0" tIns="40640" rIns="0" bIns="0" rtlCol="0" anchor="t"/>
+          <a:lstStyle/>
+          <a:p>
+            <a:pPr lvl="0" algn="ctr">
               <a:lnSpc>
                 <a:spcPct val="99600"/>
               </a:lnSpc>
             </a:pPr>
             <a:r>
-              <a:rPr lang="en-US" sz="3200" b="false" i="false" u="none" strike="noStrike">
+              <a:rPr lang="en-US" sz="3200" b="0" i="0" u="none" strike="noStrike">
                 <a:solidFill>
                   <a:srgbClr val="FAFAFA"/>
                 </a:solidFill>
@@ -3818,12 +6400,12 @@
       </p:sp>
       <p:sp>
         <p:nvSpPr>
-          <p:cNvPr name="TextBox 27" id="27"/>
-          <p:cNvSpPr txBox="true"/>
-          <p:nvPr/>
-        </p:nvSpPr>
-        <p:spPr>
-          <a:xfrm rot="0">
+          <p:cNvPr id="27" name="TextBox 27"/>
+          <p:cNvSpPr txBox="1"/>
+          <p:nvPr/>
+        </p:nvSpPr>
+        <p:spPr>
+          <a:xfrm>
             <a:off x="736600" y="533400"/>
             <a:ext cx="9829800" cy="1384300"/>
           </a:xfrm>
@@ -3832,16 +6414,16 @@
           </a:prstGeom>
         </p:spPr>
         <p:txBody>
-          <a:bodyPr anchor="t" rtlCol="false" lIns="0" tIns="115146" rIns="0" bIns="0"/>
-          <a:lstStyle/>
-          <a:p>
-            <a:pPr algn="ctr" lvl="0">
+          <a:bodyPr lIns="0" tIns="115146" rIns="0" bIns="0" rtlCol="0" anchor="t"/>
+          <a:lstStyle/>
+          <a:p>
+            <a:pPr lvl="0" algn="ctr">
               <a:lnSpc>
                 <a:spcPct val="83000"/>
               </a:lnSpc>
             </a:pPr>
             <a:r>
-              <a:rPr lang="en-US" sz="4533" b="false" i="false" u="none" strike="noStrike">
+              <a:rPr lang="en-US" sz="4533" b="0" i="0" u="none" strike="noStrike" dirty="0">
                 <a:solidFill>
                   <a:srgbClr val="FAFAFA"/>
                 </a:solidFill>
@@ -3856,12 +6438,12 @@
       </p:sp>
       <p:sp>
         <p:nvSpPr>
-          <p:cNvPr name="TextBox 28" id="28"/>
-          <p:cNvSpPr txBox="true"/>
-          <p:nvPr/>
-        </p:nvSpPr>
-        <p:spPr>
-          <a:xfrm rot="0">
+          <p:cNvPr id="28" name="TextBox 28"/>
+          <p:cNvSpPr txBox="1"/>
+          <p:nvPr/>
+        </p:nvSpPr>
+        <p:spPr>
+          <a:xfrm>
             <a:off x="1181100" y="1993900"/>
             <a:ext cx="8966200" cy="431800"/>
           </a:xfrm>
@@ -3870,16 +6452,16 @@
           </a:prstGeom>
         </p:spPr>
         <p:txBody>
-          <a:bodyPr anchor="t" rtlCol="false" lIns="0" tIns="30480" rIns="0" bIns="0"/>
-          <a:lstStyle/>
-          <a:p>
-            <a:pPr algn="ctr" lvl="0">
+          <a:bodyPr lIns="0" tIns="30480" rIns="0" bIns="0" rtlCol="0" anchor="t"/>
+          <a:lstStyle/>
+          <a:p>
+            <a:pPr lvl="0" algn="ctr">
               <a:lnSpc>
                 <a:spcPct val="99600"/>
               </a:lnSpc>
             </a:pPr>
             <a:r>
-              <a:rPr lang="en-US" sz="2400" b="false" i="false" u="none" strike="noStrike">
+              <a:rPr lang="en-US" sz="2400" b="0" i="0" u="none" strike="noStrike">
                 <a:solidFill>
                   <a:srgbClr val="FAFAFA"/>
                 </a:solidFill>
@@ -3893,6 +6475,11 @@
         </p:txBody>
       </p:sp>
     </p:spTree>
+    <p:extLst>
+      <p:ext uri="{BB962C8B-B14F-4D97-AF65-F5344CB8AC3E}">
+        <p14:creationId xmlns:p14="http://schemas.microsoft.com/office/powerpoint/2010/main" val="950193498"/>
+      </p:ext>
+    </p:extLst>
   </p:cSld>
   <p:clrMapOvr>
     <a:masterClrMapping/>

--- a/LG_부트캠프_12기_C반_프로젝트일정_및_최종제출결과물_3팀/LG_부트캠프_12기_C반_최종결과물(3팀)/포스터/LG_부트캠프_12기_C반_결과보고서(3팀).pptx
+++ b/LG_부트캠프_12기_C반_프로젝트일정_및_최종제출결과물_3팀/LG_부트캠프_12기_C반_최종결과물(3팀)/포스터/LG_부트캠프_12기_C반_결과보고서(3팀).pptx
@@ -3489,7 +3489,33 @@
                 <a:ea typeface="LG스마트체2.0 Light" panose="020B0600000101010101" pitchFamily="50" charset="-127"/>
                 <a:cs typeface="Work Sans Regular"/>
               </a:rPr>
-              <a:t>쿵야 캐치마인드 </a:t>
+              <a:t>쿵야 캐치마인드</a:t>
+            </a:r>
+            <a:endParaRPr lang="en-US" altLang="ko-KR" sz="2400" dirty="0" smtClean="0">
+              <a:solidFill>
+                <a:srgbClr val="333333"/>
+              </a:solidFill>
+              <a:latin typeface="LG스마트체2.0 Light" panose="020B0600000101010101" pitchFamily="50" charset="-127"/>
+              <a:ea typeface="LG스마트체2.0 Light" panose="020B0600000101010101" pitchFamily="50" charset="-127"/>
+              <a:cs typeface="Work Sans Regular"/>
+            </a:endParaRPr>
+          </a:p>
+          <a:p>
+            <a:pPr lvl="0" algn="l">
+              <a:lnSpc>
+                <a:spcPct val="99600"/>
+              </a:lnSpc>
+            </a:pPr>
+            <a:r>
+              <a:rPr lang="ko-KR" altLang="en-US" sz="2400" dirty="0" smtClean="0">
+                <a:solidFill>
+                  <a:srgbClr val="333333"/>
+                </a:solidFill>
+                <a:latin typeface="LG스마트체2.0 Light" panose="020B0600000101010101" pitchFamily="50" charset="-127"/>
+                <a:ea typeface="LG스마트체2.0 Light" panose="020B0600000101010101" pitchFamily="50" charset="-127"/>
+                <a:cs typeface="Work Sans Regular"/>
+              </a:rPr>
+              <a:t> </a:t>
             </a:r>
             <a:endParaRPr lang="en-US" altLang="ko-KR" sz="2400" dirty="0" smtClean="0">
               <a:solidFill>
